--- a/10-Knowledge-Products/KP1-GEA/videos/module_4/en/decks/KP1_M4_4.8_Deck_v0.2.pptx
+++ b/10-Knowledge-Products/KP1-GEA/videos/module_4/en/decks/KP1_M4_4.8_Deck_v0.2.pptx
@@ -14,14 +14,14 @@
     <p:handoutMasterId r:id="rId47"/>
   </p:handoutMasterIdLst>
   <p:sldIdLst>
-    <p:sldId id="2681" r:id="rId8"/>
-    <p:sldId id="2744" r:id="rId66"/>
-    <p:sldId id="2745" r:id="rId67"/>
-    <p:sldId id="2746" r:id="rId68"/>
-    <p:sldId id="2747" r:id="rId69"/>
-    <p:sldId id="2748" r:id="rId70"/>
-    <p:sldId id="2749" r:id="rId71"/>
-    <p:sldId id="2750" r:id="rId72"/>
+    <p:sldId id="2751" r:id="rId73"/>
+    <p:sldId id="2752" r:id="rId74"/>
+    <p:sldId id="2753" r:id="rId75"/>
+    <p:sldId id="2754" r:id="rId76"/>
+    <p:sldId id="2755" r:id="rId77"/>
+    <p:sldId id="2756" r:id="rId78"/>
+    <p:sldId id="2757" r:id="rId79"/>
+    <p:sldId id="2758" r:id="rId80"/>
   </p:sldIdLst>
   <p:sldSz cx="12192000" cy="6858000"/>
   <p:notesSz cx="6858000" cy="9144000"/>
@@ -888,7 +888,7 @@
 </p:notesMaster>
 </file>
 
-<file path=ppt/notesSlides/notesSlide21.xml><?xml version="1.0" encoding="utf-8"?>
+<file path=ppt/notesSlides/notesSlide58.xml><?xml version="1.0" encoding="utf-8"?>
 <p:notes xmlns:a="http://schemas.openxmlformats.org/drawingml/2006/main" xmlns:p="http://schemas.openxmlformats.org/presentationml/2006/main" xmlns:r="http://schemas.openxmlformats.org/officeDocument/2006/relationships">
   <p:cSld>
     <p:spTree>
@@ -933,7 +933,7 @@
           <a:lstStyle/>
           <a:p>
             <a:r>
-              <a:t>Title card for standalone video 4.8. Content slides are identical to the corresponding section of the combined deck KP1_M4_Deck_v0.2.pptx; voice-over is in each slide’s notes.</a:t>
+              <a:t>Title card — the cold open. The hosts name the module, the video number, the title and the single message on this slide; no scripted narration. Hold until the opener begins; the opener is narrated on the next slide.</a:t>
             </a:r>
           </a:p>
         </p:txBody>
@@ -958,7 +958,7 @@
 </p:notes>
 </file>
 
-<file path=ppt/notesSlides/notesSlide51.xml><?xml version="1.0" encoding="utf-8"?>
+<file path=ppt/notesSlides/notesSlide59.xml><?xml version="1.0" encoding="utf-8"?>
 <p:notes xmlns:a="http://schemas.openxmlformats.org/drawingml/2006/main" xmlns:p="http://schemas.openxmlformats.org/presentationml/2006/main" xmlns:r="http://schemas.openxmlformats.org/officeDocument/2006/relationships">
   <p:cSld>
     <p:spTree>
@@ -1003,7 +1003,7 @@
           <a:lstStyle/>
           <a:p>
             <a:r>
-              <a:t>VO, slide 1: The value of a worked example is not Progressa itself — it is that the same five phases, four sign-offs and six deliverables run on any public-sector domain you are handed. Here is the recipe, stripped to what transfers.</a:t>
+              <a:t>VO: The value of a worked example is not Progressa itself — it is that the same five phases, four sign-offs and six deliverables run on any public-sector domain you are handed. Here is the recipe, stripped to what transfers.</a:t>
             </a:r>
           </a:p>
         </p:txBody>
@@ -1028,7 +1028,7 @@
 </p:notes>
 </file>
 
-<file path=ppt/notesSlides/notesSlide52.xml><?xml version="1.0" encoding="utf-8"?>
+<file path=ppt/notesSlides/notesSlide60.xml><?xml version="1.0" encoding="utf-8"?>
 <p:notes xmlns:a="http://schemas.openxmlformats.org/drawingml/2006/main" xmlns:p="http://schemas.openxmlformats.org/presentationml/2006/main" xmlns:r="http://schemas.openxmlformats.org/officeDocument/2006/relationships">
   <p:cSld>
     <p:spTree>
@@ -1098,7 +1098,7 @@
 </p:notes>
 </file>
 
-<file path=ppt/notesSlides/notesSlide53.xml><?xml version="1.0" encoding="utf-8"?>
+<file path=ppt/notesSlides/notesSlide61.xml><?xml version="1.0" encoding="utf-8"?>
 <p:notes xmlns:a="http://schemas.openxmlformats.org/drawingml/2006/main" xmlns:p="http://schemas.openxmlformats.org/presentationml/2006/main" xmlns:r="http://schemas.openxmlformats.org/officeDocument/2006/relationships">
   <p:cSld>
     <p:spTree>
@@ -1168,7 +1168,7 @@
 </p:notes>
 </file>
 
-<file path=ppt/notesSlides/notesSlide54.xml><?xml version="1.0" encoding="utf-8"?>
+<file path=ppt/notesSlides/notesSlide62.xml><?xml version="1.0" encoding="utf-8"?>
 <p:notes xmlns:a="http://schemas.openxmlformats.org/drawingml/2006/main" xmlns:p="http://schemas.openxmlformats.org/presentationml/2006/main" xmlns:r="http://schemas.openxmlformats.org/officeDocument/2006/relationships">
   <p:cSld>
     <p:spTree>
@@ -1244,7 +1244,7 @@
 </p:notes>
 </file>
 
-<file path=ppt/notesSlides/notesSlide55.xml><?xml version="1.0" encoding="utf-8"?>
+<file path=ppt/notesSlides/notesSlide63.xml><?xml version="1.0" encoding="utf-8"?>
 <p:notes xmlns:a="http://schemas.openxmlformats.org/drawingml/2006/main" xmlns:p="http://schemas.openxmlformats.org/presentationml/2006/main" xmlns:r="http://schemas.openxmlformats.org/officeDocument/2006/relationships">
   <p:cSld>
     <p:spTree>
@@ -1314,7 +1314,7 @@
 </p:notes>
 </file>
 
-<file path=ppt/notesSlides/notesSlide56.xml><?xml version="1.0" encoding="utf-8"?>
+<file path=ppt/notesSlides/notesSlide64.xml><?xml version="1.0" encoding="utf-8"?>
 <p:notes xmlns:a="http://schemas.openxmlformats.org/drawingml/2006/main" xmlns:p="http://schemas.openxmlformats.org/presentationml/2006/main" xmlns:r="http://schemas.openxmlformats.org/officeDocument/2006/relationships">
   <p:cSld>
     <p:spTree>
@@ -1390,7 +1390,7 @@
 </p:notes>
 </file>
 
-<file path=ppt/notesSlides/notesSlide57.xml><?xml version="1.0" encoding="utf-8"?>
+<file path=ppt/notesSlides/notesSlide65.xml><?xml version="1.0" encoding="utf-8"?>
 <p:notes xmlns:a="http://schemas.openxmlformats.org/drawingml/2006/main" xmlns:p="http://schemas.openxmlformats.org/presentationml/2006/main" xmlns:r="http://schemas.openxmlformats.org/officeDocument/2006/relationships">
   <p:cSld>
     <p:spTree>
@@ -11596,8 +11596,8 @@
 </p:sldMaster>
 </file>
 
-<file path=ppt/slides/slide1.xml><?xml version="1.0" encoding="utf-8"?>
-<p:sld xmlns:a="http://schemas.openxmlformats.org/drawingml/2006/main" xmlns:r="http://schemas.openxmlformats.org/officeDocument/2006/relationships" xmlns:p="http://schemas.openxmlformats.org/presentationml/2006/main">
+<file path=ppt/slides/slide58.xml><?xml version="1.0" encoding="utf-8"?>
+<p:sld xmlns:a="http://schemas.openxmlformats.org/drawingml/2006/main" xmlns:p="http://schemas.openxmlformats.org/presentationml/2006/main" xmlns:r="http://schemas.openxmlformats.org/officeDocument/2006/relationships">
   <p:cSld>
     <p:spTree>
       <p:nvGrpSpPr>
@@ -11605,222 +11605,133 @@
         <p:cNvGrpSpPr/>
         <p:nvPr/>
       </p:nvGrpSpPr>
-      <p:grpSpPr>
-        <a:xfrm>
-          <a:off x="0" y="0"/>
-          <a:ext cx="0" cy="0"/>
-          <a:chOff x="0" y="0"/>
-          <a:chExt cx="0" cy="0"/>
-        </a:xfrm>
-      </p:grpSpPr>
-      <p:cxnSp>
-        <p:nvCxnSpPr>
-          <p:cNvPr id="11" name="Straight Connector 10">
-            <a:extLst>
-              <a:ext uri="{FF2B5EF4-FFF2-40B4-BE49-F238E27FC236}">
-                <a16:creationId xmlns:a16="http://schemas.microsoft.com/office/drawing/2014/main" id="{D9AD66F2-F7C0-4D03-9150-D28F17AC561D}"/>
-              </a:ext>
-            </a:extLst>
-          </p:cNvPr>
-          <p:cNvCxnSpPr>
-            <a:cxnSpLocks/>
-          </p:cNvCxnSpPr>
+      <p:grpSpPr/>
+      <p:sp>
+        <p:nvSpPr>
+          <p:cNvPr id="2" name="TextBox 1"/>
+          <p:cNvSpPr txBox="1"/>
           <p:nvPr/>
-        </p:nvCxnSpPr>
-        <p:spPr>
-          <a:xfrm>
-            <a:off x="373021" y="2198718"/>
-            <a:ext cx="6843567" cy="0"/>
-          </a:xfrm>
-          <a:prstGeom prst="line">
-            <a:avLst/>
-          </a:prstGeom>
-          <a:ln w="12700">
-            <a:solidFill>
-              <a:srgbClr val="009CD6"/>
-            </a:solidFill>
-          </a:ln>
-        </p:spPr>
-        <p:style>
-          <a:lnRef idx="1">
-            <a:schemeClr val="accent1"/>
-          </a:lnRef>
-          <a:fillRef idx="0">
-            <a:schemeClr val="accent1"/>
-          </a:fillRef>
-          <a:effectRef idx="0">
-            <a:schemeClr val="accent1"/>
-          </a:effectRef>
-          <a:fontRef idx="minor">
-            <a:schemeClr val="tx1"/>
-          </a:fontRef>
-        </p:style>
-      </p:cxnSp>
-      <p:sp>
-        <p:nvSpPr>
-          <p:cNvPr id="12" name="Title 9">
-            <a:extLst>
-              <a:ext uri="{FF2B5EF4-FFF2-40B4-BE49-F238E27FC236}">
-                <a16:creationId xmlns:a16="http://schemas.microsoft.com/office/drawing/2014/main" id="{EEB08032-CE0E-4986-AEDF-A41026C0E8B9}"/>
-              </a:ext>
-            </a:extLst>
-          </p:cNvPr>
-          <p:cNvSpPr txBox="1">
-            <a:spLocks/>
-          </p:cNvSpPr>
-          <p:nvPr/>
-        </p:nvSpPr>
-        <p:spPr>
-          <a:xfrm>
-            <a:off x="237734" y="702833"/>
-            <a:ext cx="6432007" cy="1218817"/>
+        </p:nvSpPr>
+        <p:spPr>
+          <a:xfrm>
+            <a:off x="822960" y="822960"/>
+            <a:ext cx="7315200" cy="457200"/>
           </a:xfrm>
           <a:prstGeom prst="rect">
             <a:avLst/>
           </a:prstGeom>
-        </p:spPr>
-        <p:txBody>
-          <a:bodyPr anchor="b">
-            <a:noAutofit/>
+          <a:noFill/>
+        </p:spPr>
+        <p:txBody>
+          <a:bodyPr wrap="square">
+            <a:spAutoFit/>
           </a:bodyPr>
-          <a:lstStyle>
-            <a:lvl1pPr algn="l" defTabSz="914400" rtl="0" eaLnBrk="1" latinLnBrk="0" hangingPunct="1">
-              <a:lnSpc>
-                <a:spcPct val="90000"/>
-              </a:lnSpc>
-              <a:spcBef>
-                <a:spcPct val="0"/>
-              </a:spcBef>
-              <a:buNone/>
-              <a:defRPr sz="4000" kern="1200">
+          <a:lstStyle/>
+          <a:p>
+            <a:r>
+              <a:rPr sz="1200" b="1" i="0">
                 <a:solidFill>
-                  <a:schemeClr val="bg1"/>
+                  <a:srgbClr val="595959"/>
                 </a:solidFill>
-                <a:latin typeface="Arial" panose="020B0604020202020204" pitchFamily="34" charset="0"/>
-                <a:ea typeface="+mj-ea"/>
-                <a:cs typeface="Arial" panose="020B0604020202020204" pitchFamily="34" charset="0"/>
-              </a:defRPr>
-            </a:lvl1pPr>
-          </a:lstStyle>
-          <a:p>
-            <a:r>
-              <a:rPr sz="2400" b="1" i="0">
+                <a:latin typeface="Arial"/>
+              </a:rPr>
+              <a:t>KP1 · MODULE 4 · VIDEO 4.8</a:t>
+            </a:r>
+          </a:p>
+        </p:txBody>
+      </p:sp>
+      <p:sp>
+        <p:nvSpPr>
+          <p:cNvPr id="3" name="TextBox 2"/>
+          <p:cNvSpPr txBox="1"/>
+          <p:nvPr/>
+        </p:nvSpPr>
+        <p:spPr>
+          <a:xfrm>
+            <a:off x="822960" y="1828800"/>
+            <a:ext cx="2011680" cy="1097280"/>
+          </a:xfrm>
+          <a:prstGeom prst="rect">
+            <a:avLst/>
+          </a:prstGeom>
+          <a:noFill/>
+        </p:spPr>
+        <p:txBody>
+          <a:bodyPr wrap="square">
+            <a:spAutoFit/>
+          </a:bodyPr>
+          <a:lstStyle/>
+          <a:p>
+            <a:r>
+              <a:rPr sz="6000" b="1" i="0">
+                <a:solidFill>
+                  <a:srgbClr val="009CD6"/>
+                </a:solidFill>
+                <a:latin typeface="Arial"/>
+              </a:rPr>
+              <a:t>4.8</a:t>
+            </a:r>
+          </a:p>
+        </p:txBody>
+      </p:sp>
+      <p:sp>
+        <p:nvSpPr>
+          <p:cNvPr id="4" name="TextBox 3"/>
+          <p:cNvSpPr txBox="1"/>
+          <p:nvPr/>
+        </p:nvSpPr>
+        <p:spPr>
+          <a:xfrm>
+            <a:off x="822960" y="2880360"/>
+            <a:ext cx="9601200" cy="1371600"/>
+          </a:xfrm>
+          <a:prstGeom prst="rect">
+            <a:avLst/>
+          </a:prstGeom>
+          <a:noFill/>
+        </p:spPr>
+        <p:txBody>
+          <a:bodyPr wrap="square">
+            <a:spAutoFit/>
+          </a:bodyPr>
+          <a:lstStyle/>
+          <a:p>
+            <a:r>
+              <a:rPr sz="3400" b="1" i="0">
                 <a:solidFill>
                   <a:srgbClr val="1A1A1A"/>
                 </a:solidFill>
                 <a:latin typeface="Arial"/>
               </a:rPr>
-              <a:t>4.8 — Run this on your own sector — the transferable recipe</a:t>
-            </a:r>
-          </a:p>
-        </p:txBody>
-      </p:sp>
-      <p:pic>
-        <p:nvPicPr>
-          <p:cNvPr id="7" name="Picture 6">
-            <a:extLst>
-              <a:ext uri="{FF2B5EF4-FFF2-40B4-BE49-F238E27FC236}">
-                <a16:creationId xmlns:a16="http://schemas.microsoft.com/office/drawing/2014/main" id="{A2066351-C569-4C4C-A096-308777FCDC32}"/>
-              </a:ext>
-            </a:extLst>
-          </p:cNvPr>
-          <p:cNvPicPr>
-            <a:picLocks noChangeAspect="1"/>
-          </p:cNvPicPr>
+              <a:t>Run this on your own sector — the transferable recipe</a:t>
+            </a:r>
+          </a:p>
+        </p:txBody>
+      </p:sp>
+      <p:sp>
+        <p:nvSpPr>
+          <p:cNvPr id="5" name="TextBox 4"/>
+          <p:cNvSpPr txBox="1"/>
           <p:nvPr/>
-        </p:nvPicPr>
-        <p:blipFill>
-          <a:blip r:embed="rId2">
-            <a:extLst>
-              <a:ext uri="{28A0092B-C50C-407E-A947-70E740481C1C}">
-                <a14:useLocalDpi xmlns:a14="http://schemas.microsoft.com/office/drawing/2010/main" val="0"/>
-              </a:ext>
-            </a:extLst>
-          </a:blip>
-          <a:srcRect t="20219" b="14729"/>
-          <a:stretch>
-            <a:fillRect/>
-          </a:stretch>
-        </p:blipFill>
-        <p:spPr>
-          <a:xfrm>
-            <a:off x="0" y="5620871"/>
-            <a:ext cx="1323975" cy="1218816"/>
+        </p:nvSpPr>
+        <p:spPr>
+          <a:xfrm>
+            <a:off x="822960" y="4343400"/>
+            <a:ext cx="9875520" cy="1554480"/>
           </a:xfrm>
           <a:prstGeom prst="rect">
             <a:avLst/>
           </a:prstGeom>
-        </p:spPr>
-      </p:pic>
-      <p:sp>
-        <p:nvSpPr>
-          <p:cNvPr id="14" name="Title 9">
-            <a:extLst>
-              <a:ext uri="{FF2B5EF4-FFF2-40B4-BE49-F238E27FC236}">
-                <a16:creationId xmlns:a16="http://schemas.microsoft.com/office/drawing/2014/main" id="{B5087B80-3EE4-1881-0130-ED58CA625092}"/>
-              </a:ext>
-            </a:extLst>
-          </p:cNvPr>
-          <p:cNvSpPr txBox="1">
-            <a:spLocks/>
-          </p:cNvSpPr>
-          <p:nvPr/>
-        </p:nvSpPr>
-        <p:spPr>
-          <a:xfrm>
-            <a:off x="284452" y="2475786"/>
-            <a:ext cx="6382893" cy="953213"/>
-          </a:xfrm>
-          <a:prstGeom prst="rect">
-            <a:avLst/>
-          </a:prstGeom>
-        </p:spPr>
-        <p:txBody>
-          <a:bodyPr anchor="t">
-            <a:noAutofit/>
+          <a:noFill/>
+        </p:spPr>
+        <p:txBody>
+          <a:bodyPr wrap="square">
+            <a:spAutoFit/>
           </a:bodyPr>
-          <a:lstStyle>
-            <a:lvl1pPr algn="l" defTabSz="914400" rtl="0" eaLnBrk="1" latinLnBrk="0" hangingPunct="1">
-              <a:lnSpc>
-                <a:spcPct val="90000"/>
-              </a:lnSpc>
-              <a:spcBef>
-                <a:spcPct val="0"/>
-              </a:spcBef>
-              <a:buNone/>
-              <a:defRPr sz="4000" kern="1200">
-                <a:solidFill>
-                  <a:schemeClr val="bg1"/>
-                </a:solidFill>
-                <a:latin typeface="Arial" panose="020B0604020202020204" pitchFamily="34" charset="0"/>
-                <a:ea typeface="+mj-ea"/>
-                <a:cs typeface="Arial" panose="020B0604020202020204" pitchFamily="34" charset="0"/>
-              </a:defRPr>
-            </a:lvl1pPr>
-          </a:lstStyle>
-          <a:p>
-            <a:pPr marL="0" marR="0" lvl="0" indent="0" rtl="0">
-              <a:spcBef>
-                <a:spcPts val="600"/>
-              </a:spcBef>
-              <a:spcAft>
-                <a:spcPts val="0"/>
-              </a:spcAft>
-              <a:buNone/>
-            </a:pPr>
-            <a:r>
-              <a:rPr sz="1300" b="1" i="0">
-                <a:solidFill>
-                  <a:srgbClr val="006E96"/>
-                </a:solidFill>
-                <a:latin typeface="Arial"/>
-              </a:rPr>
-              <a:t>KP1 · Government Enterprise Architecture · Module 4 · Video 4.8</a:t>
-            </a:r>
-          </a:p>
-          <a:p>
-            <a:r>
-              <a:rPr sz="1200" b="0" i="1">
+          <a:lstStyle/>
+          <a:p>
+            <a:r>
+              <a:rPr sz="1700" b="0" i="1">
                 <a:solidFill>
                   <a:srgbClr val="595959"/>
                 </a:solidFill>
@@ -11833,91 +11744,276 @@
       </p:sp>
       <p:sp>
         <p:nvSpPr>
-          <p:cNvPr id="17" name="Title 9">
-            <a:extLst>
-              <a:ext uri="{FF2B5EF4-FFF2-40B4-BE49-F238E27FC236}">
-                <a16:creationId xmlns:a16="http://schemas.microsoft.com/office/drawing/2014/main" id="{5E8796F7-DD26-D250-5E97-B38B22298E72}"/>
-              </a:ext>
-            </a:extLst>
-          </p:cNvPr>
-          <p:cNvSpPr txBox="1">
-            <a:spLocks/>
-          </p:cNvSpPr>
+          <p:cNvPr id="6" name="TextBox 5"/>
+          <p:cNvSpPr txBox="1"/>
           <p:nvPr/>
         </p:nvSpPr>
         <p:spPr>
           <a:xfrm>
-            <a:off x="284452" y="4363897"/>
-            <a:ext cx="6382893" cy="953213"/>
+            <a:off x="822960" y="5989320"/>
+            <a:ext cx="7315200" cy="365760"/>
           </a:xfrm>
           <a:prstGeom prst="rect">
             <a:avLst/>
           </a:prstGeom>
-        </p:spPr>
-        <p:txBody>
-          <a:bodyPr anchor="t">
-            <a:noAutofit/>
+          <a:noFill/>
+        </p:spPr>
+        <p:txBody>
+          <a:bodyPr wrap="square">
+            <a:spAutoFit/>
           </a:bodyPr>
-          <a:lstStyle>
-            <a:lvl1pPr algn="l" defTabSz="914400" rtl="0" eaLnBrk="1" latinLnBrk="0" hangingPunct="1">
-              <a:lnSpc>
-                <a:spcPct val="90000"/>
-              </a:lnSpc>
-              <a:spcBef>
-                <a:spcPct val="0"/>
-              </a:spcBef>
-              <a:buNone/>
-              <a:defRPr sz="4000" kern="1200">
+          <a:lstStyle/>
+          <a:p>
+            <a:r>
+              <a:rPr sz="1200" b="0" i="0">
                 <a:solidFill>
-                  <a:schemeClr val="bg1"/>
+                  <a:srgbClr val="595959"/>
                 </a:solidFill>
-                <a:latin typeface="Arial" panose="020B0604020202020204" pitchFamily="34" charset="0"/>
-                <a:ea typeface="+mj-ea"/>
-                <a:cs typeface="Arial" panose="020B0604020202020204" pitchFamily="34" charset="0"/>
-              </a:defRPr>
-            </a:lvl1pPr>
-          </a:lstStyle>
-          <a:p>
-            <a:pPr marL="0" marR="0" lvl="0" indent="0" rtl="0">
-              <a:spcBef>
-                <a:spcPts val="600"/>
-              </a:spcBef>
-              <a:spcAft>
-                <a:spcPts val="1200"/>
-              </a:spcAft>
-              <a:buNone/>
-            </a:pPr>
-            <a:r>
-              <a:rPr sz="1400" b="1" i="0">
+                <a:latin typeface="Arial"/>
+              </a:rPr>
+              <a:t>~4 minutes · standalone video · voice-over on text slides</a:t>
+            </a:r>
+          </a:p>
+        </p:txBody>
+      </p:sp>
+    </p:spTree>
+  </p:cSld>
+  <p:clrMapOvr>
+    <a:masterClrMapping/>
+  </p:clrMapOvr>
+</p:sld>
+</file>
+
+<file path=ppt/slides/slide59.xml><?xml version="1.0" encoding="utf-8"?>
+<p:sld xmlns:a="http://schemas.openxmlformats.org/drawingml/2006/main" xmlns:p="http://schemas.openxmlformats.org/presentationml/2006/main" xmlns:r="http://schemas.openxmlformats.org/officeDocument/2006/relationships">
+  <p:cSld>
+    <p:spTree>
+      <p:nvGrpSpPr>
+        <p:cNvPr id="1" name=""/>
+        <p:cNvGrpSpPr/>
+        <p:nvPr/>
+      </p:nvGrpSpPr>
+      <p:grpSpPr/>
+      <p:sp>
+        <p:nvSpPr>
+          <p:cNvPr id="2" name="TextBox 1"/>
+          <p:cNvSpPr txBox="1"/>
+          <p:nvPr/>
+        </p:nvSpPr>
+        <p:spPr>
+          <a:xfrm>
+            <a:off x="1005840" y="1325880"/>
+            <a:ext cx="5486400" cy="365760"/>
+          </a:xfrm>
+          <a:prstGeom prst="rect">
+            <a:avLst/>
+          </a:prstGeom>
+          <a:noFill/>
+        </p:spPr>
+        <p:txBody>
+          <a:bodyPr wrap="square">
+            <a:spAutoFit/>
+          </a:bodyPr>
+          <a:lstStyle/>
+          <a:p>
+            <a:r>
+              <a:rPr sz="1200" b="1" i="0">
+                <a:solidFill>
+                  <a:srgbClr val="006E96"/>
+                </a:solidFill>
+                <a:latin typeface="Arial"/>
+              </a:rPr>
+              <a:t>WHERE WE START</a:t>
+            </a:r>
+          </a:p>
+        </p:txBody>
+      </p:sp>
+      <p:sp>
+        <p:nvSpPr>
+          <p:cNvPr id="3" name="TextBox 2"/>
+          <p:cNvSpPr txBox="1"/>
+          <p:nvPr/>
+        </p:nvSpPr>
+        <p:spPr>
+          <a:xfrm>
+            <a:off x="1005840" y="1783080"/>
+            <a:ext cx="10149840" cy="1737360"/>
+          </a:xfrm>
+          <a:prstGeom prst="rect">
+            <a:avLst/>
+          </a:prstGeom>
+          <a:noFill/>
+        </p:spPr>
+        <p:txBody>
+          <a:bodyPr wrap="square">
+            <a:spAutoFit/>
+          </a:bodyPr>
+          <a:lstStyle/>
+          <a:p>
+            <a:r>
+              <a:rPr sz="3000" b="1" i="0">
                 <a:solidFill>
                   <a:srgbClr val="1A1A1A"/>
                 </a:solidFill>
                 <a:latin typeface="Arial"/>
               </a:rPr>
-              <a:t>Target audience: </a:t>
-            </a:r>
-            <a:r>
-              <a:rPr sz="1400" b="0" i="0">
+              <a:t>Swap the data. Keep the method.</a:t>
+            </a:r>
+          </a:p>
+        </p:txBody>
+      </p:sp>
+      <p:sp>
+        <p:nvSpPr>
+          <p:cNvPr id="4" name="TextBox 3"/>
+          <p:cNvSpPr txBox="1"/>
+          <p:nvPr/>
+        </p:nvSpPr>
+        <p:spPr>
+          <a:xfrm>
+            <a:off x="1005840" y="3611880"/>
+            <a:ext cx="10149840" cy="2377440"/>
+          </a:xfrm>
+          <a:prstGeom prst="rect">
+            <a:avLst/>
+          </a:prstGeom>
+          <a:noFill/>
+        </p:spPr>
+        <p:txBody>
+          <a:bodyPr wrap="square">
+            <a:spAutoFit/>
+          </a:bodyPr>
+          <a:lstStyle/>
+          <a:p>
+            <a:pPr>
+              <a:spcAft>
+                <a:spcPts val="800"/>
+              </a:spcAft>
+            </a:pPr>
+            <a:r>
+              <a:rPr sz="1700" b="0" i="0">
                 <a:solidFill>
-                  <a:srgbClr val="1A1A1A"/>
+                  <a:srgbClr val="595959"/>
                 </a:solidFill>
                 <a:latin typeface="Arial"/>
               </a:rPr>
-              <a:t>Chief architect · senior architect · sector ICT lead</a:t>
-            </a:r>
-          </a:p>
-        </p:txBody>
-      </p:sp>
-      <p:sp>
-        <p:nvSpPr>
-          <p:cNvPr id="18" name="Rectangle 17"/>
+              <a:t>The value of a worked example is not Progressa itself.</a:t>
+            </a:r>
+          </a:p>
+          <a:p>
+            <a:pPr>
+              <a:spcAft>
+                <a:spcPts val="800"/>
+              </a:spcAft>
+            </a:pPr>
+            <a:r>
+              <a:rPr sz="1700" b="0" i="0">
+                <a:solidFill>
+                  <a:srgbClr val="595959"/>
+                </a:solidFill>
+                <a:latin typeface="Arial"/>
+              </a:rPr>
+              <a:t>The same five phases, four sign-offs and six deliverables run on any public-sector domain you are handed.</a:t>
+            </a:r>
+          </a:p>
+        </p:txBody>
+      </p:sp>
+      <p:sp>
+        <p:nvSpPr>
+          <p:cNvPr id="5" name="TextBox 4"/>
+          <p:cNvSpPr txBox="1"/>
+          <p:nvPr/>
+        </p:nvSpPr>
+        <p:spPr>
+          <a:xfrm>
+            <a:off x="457200" y="6473952"/>
+            <a:ext cx="7772400" cy="292608"/>
+          </a:xfrm>
+          <a:prstGeom prst="rect">
+            <a:avLst/>
+          </a:prstGeom>
+          <a:noFill/>
+        </p:spPr>
+        <p:txBody>
+          <a:bodyPr wrap="square">
+            <a:spAutoFit/>
+          </a:bodyPr>
+          <a:lstStyle/>
+          <a:p>
+            <a:r>
+              <a:rPr sz="900" b="0" i="0">
+                <a:solidFill>
+                  <a:srgbClr val="595959"/>
+                </a:solidFill>
+                <a:latin typeface="Arial"/>
+              </a:rPr>
+              <a:t>4.8 · Run this on your own sector — the transferable recipe</a:t>
+            </a:r>
+          </a:p>
+        </p:txBody>
+      </p:sp>
+      <p:sp>
+        <p:nvSpPr>
+          <p:cNvPr id="6" name="TextBox 5"/>
+          <p:cNvSpPr txBox="1"/>
+          <p:nvPr/>
+        </p:nvSpPr>
+        <p:spPr>
+          <a:xfrm>
+            <a:off x="10058400" y="6473952"/>
+            <a:ext cx="1673352" cy="292608"/>
+          </a:xfrm>
+          <a:prstGeom prst="rect">
+            <a:avLst/>
+          </a:prstGeom>
+          <a:noFill/>
+        </p:spPr>
+        <p:txBody>
+          <a:bodyPr wrap="square">
+            <a:spAutoFit/>
+          </a:bodyPr>
+          <a:lstStyle/>
+          <a:p>
+            <a:pPr algn="r"/>
+            <a:r>
+              <a:rPr sz="900" b="0" i="0">
+                <a:solidFill>
+                  <a:srgbClr val="595959"/>
+                </a:solidFill>
+                <a:latin typeface="Arial"/>
+              </a:rPr>
+              <a:t>www.itu.int</a:t>
+            </a:r>
+          </a:p>
+        </p:txBody>
+      </p:sp>
+    </p:spTree>
+  </p:cSld>
+  <p:clrMapOvr>
+    <a:masterClrMapping/>
+  </p:clrMapOvr>
+</p:sld>
+</file>
+
+<file path=ppt/slides/slide60.xml><?xml version="1.0" encoding="utf-8"?>
+<p:sld xmlns:a="http://schemas.openxmlformats.org/drawingml/2006/main" xmlns:p="http://schemas.openxmlformats.org/presentationml/2006/main" xmlns:r="http://schemas.openxmlformats.org/officeDocument/2006/relationships">
+  <p:cSld>
+    <p:spTree>
+      <p:nvGrpSpPr>
+        <p:cNvPr id="1" name=""/>
+        <p:cNvGrpSpPr/>
+        <p:nvPr/>
+      </p:nvGrpSpPr>
+      <p:grpSpPr/>
+      <p:sp>
+        <p:nvSpPr>
+          <p:cNvPr id="2" name="Rectangle 1"/>
           <p:cNvSpPr/>
           <p:nvPr/>
         </p:nvSpPr>
         <p:spPr>
           <a:xfrm>
-            <a:off x="7022592" y="0"/>
-            <a:ext cx="5169103" cy="6858000"/>
+            <a:off x="457200" y="384048"/>
+            <a:ext cx="45720" cy="256032"/>
           </a:xfrm>
           <a:prstGeom prst="rect">
             <a:avLst/>
@@ -11954,14 +12050,14 @@
       </p:sp>
       <p:sp>
         <p:nvSpPr>
-          <p:cNvPr id="19" name="TextBox 18"/>
+          <p:cNvPr id="3" name="TextBox 2"/>
           <p:cNvSpPr txBox="1"/>
           <p:nvPr/>
         </p:nvSpPr>
         <p:spPr>
           <a:xfrm>
-            <a:off x="7452360" y="457200"/>
-            <a:ext cx="4297680" cy="457200"/>
+            <a:off x="621792" y="274320"/>
+            <a:ext cx="11247120" cy="914400"/>
           </a:xfrm>
           <a:prstGeom prst="rect">
             <a:avLst/>
@@ -11975,35 +12071,33 @@
           <a:lstStyle/>
           <a:p>
             <a:r>
-              <a:rPr sz="1100" b="1" i="0">
+              <a:rPr sz="2800" b="1" i="0">
                 <a:solidFill>
-                  <a:srgbClr val="E5F5FB"/>
+                  <a:srgbClr val="1A1A1A"/>
                 </a:solidFill>
                 <a:latin typeface="Arial"/>
               </a:rPr>
-              <a:t>THE FIVE PHASES, RUN ON ONE SECTOR</a:t>
-            </a:r>
-          </a:p>
-        </p:txBody>
-      </p:sp>
-      <p:sp>
-        <p:nvSpPr>
-          <p:cNvPr id="20" name="Rounded Rectangle 19"/>
+              <a:t>The recipe: five phases, six deliverables, four sign-offs</a:t>
+            </a:r>
+          </a:p>
+        </p:txBody>
+      </p:sp>
+      <p:sp>
+        <p:nvSpPr>
+          <p:cNvPr id="4" name="Oval 3"/>
           <p:cNvSpPr/>
           <p:nvPr/>
         </p:nvSpPr>
         <p:spPr>
           <a:xfrm>
-            <a:off x="7452360" y="960120"/>
-            <a:ext cx="3840480" cy="658368"/>
-          </a:xfrm>
-          <a:prstGeom prst="roundRect">
-            <a:avLst>
-              <a:gd name="adj" fmla="val 14000"/>
-            </a:avLst>
+            <a:off x="621792" y="1463040"/>
+            <a:ext cx="310896" cy="310896"/>
+          </a:xfrm>
+          <a:prstGeom prst="ellipse">
+            <a:avLst/>
           </a:prstGeom>
           <a:solidFill>
-            <a:srgbClr val="FFFFFF"/>
+            <a:srgbClr val="009CD6"/>
           </a:solidFill>
           <a:ln>
             <a:noFill/>
@@ -12025,40 +12119,93 @@
           </a:fontRef>
         </p:style>
         <p:txBody>
-          <a:bodyPr rtlCol="0" anchor="ctr" lIns="164592" wrap="square"/>
+          <a:bodyPr rtlCol="0" anchor="ctr" lIns="0" rIns="0" tIns="0" bIns="0" wrap="square"/>
           <a:lstStyle/>
           <a:p>
             <a:pPr algn="ctr"/>
             <a:r>
-              <a:rPr sz="1500" b="1" i="0">
+              <a:rPr sz="1300" b="1" i="0">
+                <a:solidFill>
+                  <a:srgbClr val="FFFFFF"/>
+                </a:solidFill>
+                <a:latin typeface="Arial"/>
+              </a:rPr>
+              <a:t>1</a:t>
+            </a:r>
+          </a:p>
+        </p:txBody>
+      </p:sp>
+      <p:sp>
+        <p:nvSpPr>
+          <p:cNvPr id="5" name="TextBox 4"/>
+          <p:cNvSpPr txBox="1"/>
+          <p:nvPr/>
+        </p:nvSpPr>
+        <p:spPr>
+          <a:xfrm>
+            <a:off x="1115568" y="1417320"/>
+            <a:ext cx="10527487" cy="685799"/>
+          </a:xfrm>
+          <a:prstGeom prst="rect">
+            <a:avLst/>
+          </a:prstGeom>
+          <a:noFill/>
+        </p:spPr>
+        <p:txBody>
+          <a:bodyPr wrap="square">
+            <a:spAutoFit/>
+          </a:bodyPr>
+          <a:lstStyle/>
+          <a:p>
+            <a:pPr>
+              <a:spcAft>
+                <a:spcPts val="300"/>
+              </a:spcAft>
+            </a:pPr>
+            <a:r>
+              <a:rPr sz="1700" b="1" i="0">
                 <a:solidFill>
                   <a:srgbClr val="1A1A1A"/>
                 </a:solidFill>
                 <a:latin typeface="Arial"/>
               </a:rPr>
-              <a:t>Discover — an honest picture</a:t>
-            </a:r>
-          </a:p>
-        </p:txBody>
-      </p:sp>
-      <p:sp>
-        <p:nvSpPr>
-          <p:cNvPr id="21" name="Rounded Rectangle 20"/>
+              <a:t>Discover</a:t>
+            </a:r>
+          </a:p>
+          <a:p>
+            <a:pPr>
+              <a:spcAft>
+                <a:spcPts val="300"/>
+              </a:spcAft>
+            </a:pPr>
+            <a:r>
+              <a:rPr sz="1550" b="0" i="0">
+                <a:solidFill>
+                  <a:srgbClr val="595959"/>
+                </a:solidFill>
+                <a:latin typeface="Arial"/>
+              </a:rPr>
+              <a:t>An honest picture of what exists today.</a:t>
+            </a:r>
+          </a:p>
+        </p:txBody>
+      </p:sp>
+      <p:sp>
+        <p:nvSpPr>
+          <p:cNvPr id="6" name="Rectangle 5"/>
           <p:cNvSpPr/>
           <p:nvPr/>
         </p:nvSpPr>
         <p:spPr>
           <a:xfrm>
-            <a:off x="7452360" y="1892808"/>
-            <a:ext cx="3840480" cy="658368"/>
-          </a:xfrm>
-          <a:prstGeom prst="roundRect">
-            <a:avLst>
-              <a:gd name="adj" fmla="val 14000"/>
-            </a:avLst>
+            <a:off x="621792" y="2107692"/>
+            <a:ext cx="10881360" cy="12700"/>
+          </a:xfrm>
+          <a:prstGeom prst="rect">
+            <a:avLst/>
           </a:prstGeom>
           <a:solidFill>
-            <a:srgbClr val="FFFFFF"/>
+            <a:srgbClr val="DDECF4"/>
           </a:solidFill>
           <a:ln>
             <a:noFill/>
@@ -12080,40 +12227,29 @@
           </a:fontRef>
         </p:style>
         <p:txBody>
-          <a:bodyPr rtlCol="0" anchor="ctr" lIns="164592" wrap="square"/>
+          <a:bodyPr rtlCol="0" anchor="ctr"/>
           <a:lstStyle/>
           <a:p>
             <a:pPr algn="ctr"/>
-            <a:r>
-              <a:rPr sz="1500" b="1" i="0">
-                <a:solidFill>
-                  <a:srgbClr val="1A1A1A"/>
-                </a:solidFill>
-                <a:latin typeface="Arial"/>
-              </a:rPr>
-              <a:t>Assess — a ranked gap analysis</a:t>
-            </a:r>
-          </a:p>
-        </p:txBody>
-      </p:sp>
-      <p:sp>
-        <p:nvSpPr>
-          <p:cNvPr id="22" name="Rounded Rectangle 21"/>
+          </a:p>
+        </p:txBody>
+      </p:sp>
+      <p:sp>
+        <p:nvSpPr>
+          <p:cNvPr id="7" name="Oval 6"/>
           <p:cNvSpPr/>
           <p:nvPr/>
         </p:nvSpPr>
         <p:spPr>
           <a:xfrm>
-            <a:off x="7452360" y="2825496"/>
-            <a:ext cx="3840480" cy="658368"/>
-          </a:xfrm>
-          <a:prstGeom prst="roundRect">
-            <a:avLst>
-              <a:gd name="adj" fmla="val 14000"/>
-            </a:avLst>
+            <a:off x="621792" y="2194560"/>
+            <a:ext cx="310896" cy="310896"/>
+          </a:xfrm>
+          <a:prstGeom prst="ellipse">
+            <a:avLst/>
           </a:prstGeom>
           <a:solidFill>
-            <a:srgbClr val="FFFFFF"/>
+            <a:srgbClr val="009CD6"/>
           </a:solidFill>
           <a:ln>
             <a:noFill/>
@@ -12135,40 +12271,93 @@
           </a:fontRef>
         </p:style>
         <p:txBody>
-          <a:bodyPr rtlCol="0" anchor="ctr" lIns="164592" wrap="square"/>
+          <a:bodyPr rtlCol="0" anchor="ctr" lIns="0" rIns="0" tIns="0" bIns="0" wrap="square"/>
           <a:lstStyle/>
           <a:p>
             <a:pPr algn="ctr"/>
             <a:r>
-              <a:rPr sz="1500" b="1" i="0">
+              <a:rPr sz="1300" b="1" i="0">
+                <a:solidFill>
+                  <a:srgbClr val="FFFFFF"/>
+                </a:solidFill>
+                <a:latin typeface="Arial"/>
+              </a:rPr>
+              <a:t>2</a:t>
+            </a:r>
+          </a:p>
+        </p:txBody>
+      </p:sp>
+      <p:sp>
+        <p:nvSpPr>
+          <p:cNvPr id="8" name="TextBox 7"/>
+          <p:cNvSpPr txBox="1"/>
+          <p:nvPr/>
+        </p:nvSpPr>
+        <p:spPr>
+          <a:xfrm>
+            <a:off x="1115568" y="2148840"/>
+            <a:ext cx="10527487" cy="685799"/>
+          </a:xfrm>
+          <a:prstGeom prst="rect">
+            <a:avLst/>
+          </a:prstGeom>
+          <a:noFill/>
+        </p:spPr>
+        <p:txBody>
+          <a:bodyPr wrap="square">
+            <a:spAutoFit/>
+          </a:bodyPr>
+          <a:lstStyle/>
+          <a:p>
+            <a:pPr>
+              <a:spcAft>
+                <a:spcPts val="300"/>
+              </a:spcAft>
+            </a:pPr>
+            <a:r>
+              <a:rPr sz="1700" b="1" i="0">
                 <a:solidFill>
                   <a:srgbClr val="1A1A1A"/>
                 </a:solidFill>
                 <a:latin typeface="Arial"/>
               </a:rPr>
-              <a:t>Adapt — framework and sourcing</a:t>
-            </a:r>
-          </a:p>
-        </p:txBody>
-      </p:sp>
-      <p:sp>
-        <p:nvSpPr>
-          <p:cNvPr id="23" name="Rounded Rectangle 22"/>
+              <a:t>Assess</a:t>
+            </a:r>
+          </a:p>
+          <a:p>
+            <a:pPr>
+              <a:spcAft>
+                <a:spcPts val="300"/>
+              </a:spcAft>
+            </a:pPr>
+            <a:r>
+              <a:rPr sz="1550" b="0" i="0">
+                <a:solidFill>
+                  <a:srgbClr val="595959"/>
+                </a:solidFill>
+                <a:latin typeface="Arial"/>
+              </a:rPr>
+              <a:t>A ranked gap analysis.</a:t>
+            </a:r>
+          </a:p>
+        </p:txBody>
+      </p:sp>
+      <p:sp>
+        <p:nvSpPr>
+          <p:cNvPr id="9" name="Rectangle 8"/>
           <p:cNvSpPr/>
           <p:nvPr/>
         </p:nvSpPr>
         <p:spPr>
           <a:xfrm>
-            <a:off x="7452360" y="3758184"/>
-            <a:ext cx="3840480" cy="658368"/>
-          </a:xfrm>
-          <a:prstGeom prst="roundRect">
-            <a:avLst>
-              <a:gd name="adj" fmla="val 14000"/>
-            </a:avLst>
+            <a:off x="621792" y="2839212"/>
+            <a:ext cx="10881360" cy="12700"/>
+          </a:xfrm>
+          <a:prstGeom prst="rect">
+            <a:avLst/>
           </a:prstGeom>
           <a:solidFill>
-            <a:srgbClr val="FFFFFF"/>
+            <a:srgbClr val="DDECF4"/>
           </a:solidFill>
           <a:ln>
             <a:noFill/>
@@ -12190,40 +12379,29 @@
           </a:fontRef>
         </p:style>
         <p:txBody>
-          <a:bodyPr rtlCol="0" anchor="ctr" lIns="164592" wrap="square"/>
+          <a:bodyPr rtlCol="0" anchor="ctr"/>
           <a:lstStyle/>
           <a:p>
             <a:pPr algn="ctr"/>
-            <a:r>
-              <a:rPr sz="1500" b="1" i="0">
-                <a:solidFill>
-                  <a:srgbClr val="1A1A1A"/>
-                </a:solidFill>
-                <a:latin typeface="Arial"/>
-              </a:rPr>
-              <a:t>Plan — the target, then the roadmap</a:t>
-            </a:r>
-          </a:p>
-        </p:txBody>
-      </p:sp>
-      <p:sp>
-        <p:nvSpPr>
-          <p:cNvPr id="24" name="Rounded Rectangle 23"/>
+          </a:p>
+        </p:txBody>
+      </p:sp>
+      <p:sp>
+        <p:nvSpPr>
+          <p:cNvPr id="10" name="Oval 9"/>
           <p:cNvSpPr/>
           <p:nvPr/>
         </p:nvSpPr>
         <p:spPr>
           <a:xfrm>
-            <a:off x="7452360" y="4690872"/>
-            <a:ext cx="3840480" cy="658368"/>
-          </a:xfrm>
-          <a:prstGeom prst="roundRect">
-            <a:avLst>
-              <a:gd name="adj" fmla="val 14000"/>
-            </a:avLst>
+            <a:off x="621792" y="2926079"/>
+            <a:ext cx="310896" cy="310896"/>
+          </a:xfrm>
+          <a:prstGeom prst="ellipse">
+            <a:avLst/>
           </a:prstGeom>
           <a:solidFill>
-            <a:srgbClr val="006E96"/>
+            <a:srgbClr val="009CD6"/>
           </a:solidFill>
           <a:ln>
             <a:noFill/>
@@ -12245,32 +12423,32 @@
           </a:fontRef>
         </p:style>
         <p:txBody>
-          <a:bodyPr rtlCol="0" anchor="ctr" lIns="164592" wrap="square"/>
+          <a:bodyPr rtlCol="0" anchor="ctr" lIns="0" rIns="0" tIns="0" bIns="0" wrap="square"/>
           <a:lstStyle/>
           <a:p>
             <a:pPr algn="ctr"/>
             <a:r>
-              <a:rPr sz="1500" b="1" i="0">
+              <a:rPr sz="1300" b="1" i="0">
                 <a:solidFill>
                   <a:srgbClr val="FFFFFF"/>
                 </a:solidFill>
                 <a:latin typeface="Arial"/>
               </a:rPr>
-              <a:t>Execute &amp; Govern — the living EA</a:t>
-            </a:r>
-          </a:p>
-        </p:txBody>
-      </p:sp>
-      <p:sp>
-        <p:nvSpPr>
-          <p:cNvPr id="25" name="TextBox 24"/>
+              <a:t>3</a:t>
+            </a:r>
+          </a:p>
+        </p:txBody>
+      </p:sp>
+      <p:sp>
+        <p:nvSpPr>
+          <p:cNvPr id="11" name="TextBox 10"/>
           <p:cNvSpPr txBox="1"/>
           <p:nvPr/>
         </p:nvSpPr>
         <p:spPr>
           <a:xfrm>
-            <a:off x="7452360" y="5806440"/>
-            <a:ext cx="4297680" cy="731520"/>
+            <a:off x="1115568" y="2880360"/>
+            <a:ext cx="10527487" cy="685799"/>
           </a:xfrm>
           <a:prstGeom prst="rect">
             <a:avLst/>
@@ -12283,245 +12461,55 @@
           </a:bodyPr>
           <a:lstStyle/>
           <a:p>
-            <a:r>
-              <a:rPr sz="1200" b="0" i="0">
+            <a:pPr>
+              <a:spcAft>
+                <a:spcPts val="300"/>
+              </a:spcAft>
+            </a:pPr>
+            <a:r>
+              <a:rPr sz="1700" b="1" i="0">
                 <a:solidFill>
-                  <a:srgbClr val="FFFFFF"/>
+                  <a:srgbClr val="1A1A1A"/>
                 </a:solidFill>
                 <a:latin typeface="Arial"/>
               </a:rPr>
-              <a:t>5 phases · 4 sign-offs · 6 deliverables · 1 worked sector</a:t>
-            </a:r>
-          </a:p>
-        </p:txBody>
-      </p:sp>
-    </p:spTree>
-    <p:extLst>
-      <p:ext uri="{BB962C8B-B14F-4D97-AF65-F5344CB8AC3E}">
-        <p14:creationId xmlns:p14="http://schemas.microsoft.com/office/powerpoint/2010/main" val="1196800265"/>
-      </p:ext>
-    </p:extLst>
-  </p:cSld>
-  <p:clrMapOvr>
-    <a:masterClrMapping/>
-  </p:clrMapOvr>
-</p:sld>
-</file>
-
-<file path=ppt/slides/slide51.xml><?xml version="1.0" encoding="utf-8"?>
-<p:sld xmlns:a="http://schemas.openxmlformats.org/drawingml/2006/main" xmlns:p="http://schemas.openxmlformats.org/presentationml/2006/main" xmlns:r="http://schemas.openxmlformats.org/officeDocument/2006/relationships">
-  <p:cSld>
-    <p:spTree>
-      <p:nvGrpSpPr>
-        <p:cNvPr id="1" name=""/>
-        <p:cNvGrpSpPr/>
-        <p:nvPr/>
-      </p:nvGrpSpPr>
-      <p:grpSpPr/>
-      <p:sp>
-        <p:nvSpPr>
-          <p:cNvPr id="2" name="TextBox 1"/>
-          <p:cNvSpPr txBox="1"/>
-          <p:nvPr/>
-        </p:nvSpPr>
-        <p:spPr>
-          <a:xfrm>
-            <a:off x="822960" y="822960"/>
-            <a:ext cx="7315200" cy="457200"/>
-          </a:xfrm>
-          <a:prstGeom prst="rect">
-            <a:avLst/>
-          </a:prstGeom>
-          <a:noFill/>
-        </p:spPr>
-        <p:txBody>
-          <a:bodyPr wrap="square">
-            <a:spAutoFit/>
-          </a:bodyPr>
-          <a:lstStyle/>
-          <a:p>
-            <a:r>
-              <a:rPr sz="1200" b="1" i="0">
+              <a:t>Adapt</a:t>
+            </a:r>
+          </a:p>
+          <a:p>
+            <a:pPr>
+              <a:spcAft>
+                <a:spcPts val="300"/>
+              </a:spcAft>
+            </a:pPr>
+            <a:r>
+              <a:rPr sz="1550" b="0" i="0">
                 <a:solidFill>
                   <a:srgbClr val="595959"/>
                 </a:solidFill>
                 <a:latin typeface="Arial"/>
               </a:rPr>
-              <a:t>KP1 · MODULE 4 · VIDEO 4.8</a:t>
-            </a:r>
-          </a:p>
-        </p:txBody>
-      </p:sp>
-      <p:sp>
-        <p:nvSpPr>
-          <p:cNvPr id="3" name="TextBox 2"/>
-          <p:cNvSpPr txBox="1"/>
-          <p:nvPr/>
-        </p:nvSpPr>
-        <p:spPr>
-          <a:xfrm>
-            <a:off x="822960" y="1828800"/>
-            <a:ext cx="2011680" cy="1097280"/>
-          </a:xfrm>
-          <a:prstGeom prst="rect">
-            <a:avLst/>
-          </a:prstGeom>
-          <a:noFill/>
-        </p:spPr>
-        <p:txBody>
-          <a:bodyPr wrap="square">
-            <a:spAutoFit/>
-          </a:bodyPr>
-          <a:lstStyle/>
-          <a:p>
-            <a:r>
-              <a:rPr sz="6000" b="1" i="0">
-                <a:solidFill>
-                  <a:srgbClr val="009CD6"/>
-                </a:solidFill>
-                <a:latin typeface="Arial"/>
-              </a:rPr>
-              <a:t>4.8</a:t>
-            </a:r>
-          </a:p>
-        </p:txBody>
-      </p:sp>
-      <p:sp>
-        <p:nvSpPr>
-          <p:cNvPr id="4" name="TextBox 3"/>
-          <p:cNvSpPr txBox="1"/>
-          <p:nvPr/>
-        </p:nvSpPr>
-        <p:spPr>
-          <a:xfrm>
-            <a:off x="822960" y="2880360"/>
-            <a:ext cx="9601200" cy="1371600"/>
-          </a:xfrm>
-          <a:prstGeom prst="rect">
-            <a:avLst/>
-          </a:prstGeom>
-          <a:noFill/>
-        </p:spPr>
-        <p:txBody>
-          <a:bodyPr wrap="square">
-            <a:spAutoFit/>
-          </a:bodyPr>
-          <a:lstStyle/>
-          <a:p>
-            <a:r>
-              <a:rPr sz="3400" b="1" i="0">
-                <a:solidFill>
-                  <a:srgbClr val="1A1A1A"/>
-                </a:solidFill>
-                <a:latin typeface="Arial"/>
-              </a:rPr>
-              <a:t>Run this on your own sector — the transferable recipe</a:t>
-            </a:r>
-          </a:p>
-        </p:txBody>
-      </p:sp>
-      <p:sp>
-        <p:nvSpPr>
-          <p:cNvPr id="5" name="TextBox 4"/>
-          <p:cNvSpPr txBox="1"/>
-          <p:nvPr/>
-        </p:nvSpPr>
-        <p:spPr>
-          <a:xfrm>
-            <a:off x="822960" y="4343400"/>
-            <a:ext cx="9875520" cy="1554480"/>
-          </a:xfrm>
-          <a:prstGeom prst="rect">
-            <a:avLst/>
-          </a:prstGeom>
-          <a:noFill/>
-        </p:spPr>
-        <p:txBody>
-          <a:bodyPr wrap="square">
-            <a:spAutoFit/>
-          </a:bodyPr>
-          <a:lstStyle/>
-          <a:p>
-            <a:r>
-              <a:rPr sz="1700" b="0" i="1">
-                <a:solidFill>
-                  <a:srgbClr val="595959"/>
-                </a:solidFill>
-                <a:latin typeface="Arial"/>
-              </a:rPr>
-              <a:t>The five phases, four sign-offs and six deliverables you watched on Progressa are the recipe — change the institutions and the data domains, and the same method runs on any sector you are handed.</a:t>
-            </a:r>
-          </a:p>
-        </p:txBody>
-      </p:sp>
-      <p:sp>
-        <p:nvSpPr>
-          <p:cNvPr id="6" name="TextBox 5"/>
-          <p:cNvSpPr txBox="1"/>
-          <p:nvPr/>
-        </p:nvSpPr>
-        <p:spPr>
-          <a:xfrm>
-            <a:off x="822960" y="5989320"/>
-            <a:ext cx="7315200" cy="365760"/>
-          </a:xfrm>
-          <a:prstGeom prst="rect">
-            <a:avLst/>
-          </a:prstGeom>
-          <a:noFill/>
-        </p:spPr>
-        <p:txBody>
-          <a:bodyPr wrap="square">
-            <a:spAutoFit/>
-          </a:bodyPr>
-          <a:lstStyle/>
-          <a:p>
-            <a:r>
-              <a:rPr sz="1200" b="0" i="0">
-                <a:solidFill>
-                  <a:srgbClr val="595959"/>
-                </a:solidFill>
-                <a:latin typeface="Arial"/>
-              </a:rPr>
-              <a:t>~4 minutes · standalone video · voice-over on text slides</a:t>
-            </a:r>
-          </a:p>
-        </p:txBody>
-      </p:sp>
-    </p:spTree>
-  </p:cSld>
-  <p:clrMapOvr>
-    <a:masterClrMapping/>
-  </p:clrMapOvr>
-</p:sld>
-</file>
-
-<file path=ppt/slides/slide52.xml><?xml version="1.0" encoding="utf-8"?>
-<p:sld xmlns:a="http://schemas.openxmlformats.org/drawingml/2006/main" xmlns:p="http://schemas.openxmlformats.org/presentationml/2006/main" xmlns:r="http://schemas.openxmlformats.org/officeDocument/2006/relationships">
-  <p:cSld>
-    <p:spTree>
-      <p:nvGrpSpPr>
-        <p:cNvPr id="1" name=""/>
-        <p:cNvGrpSpPr/>
-        <p:nvPr/>
-      </p:nvGrpSpPr>
-      <p:grpSpPr/>
-      <p:sp>
-        <p:nvSpPr>
-          <p:cNvPr id="2" name="Rectangle 1"/>
+              <a:t>A localised framework and a build-buy-share matrix.</a:t>
+            </a:r>
+          </a:p>
+        </p:txBody>
+      </p:sp>
+      <p:sp>
+        <p:nvSpPr>
+          <p:cNvPr id="12" name="Rectangle 11"/>
           <p:cNvSpPr/>
           <p:nvPr/>
         </p:nvSpPr>
         <p:spPr>
           <a:xfrm>
-            <a:off x="457200" y="384048"/>
-            <a:ext cx="45720" cy="256032"/>
+            <a:off x="621792" y="3570732"/>
+            <a:ext cx="10881360" cy="12700"/>
           </a:xfrm>
           <a:prstGeom prst="rect">
             <a:avLst/>
           </a:prstGeom>
           <a:solidFill>
-            <a:srgbClr val="009CD6"/>
+            <a:srgbClr val="DDECF4"/>
           </a:solidFill>
           <a:ln>
             <a:noFill/>
@@ -12552,47 +12540,13 @@
       </p:sp>
       <p:sp>
         <p:nvSpPr>
-          <p:cNvPr id="3" name="TextBox 2"/>
-          <p:cNvSpPr txBox="1"/>
-          <p:nvPr/>
-        </p:nvSpPr>
-        <p:spPr>
-          <a:xfrm>
-            <a:off x="621792" y="274320"/>
-            <a:ext cx="11247120" cy="914400"/>
-          </a:xfrm>
-          <a:prstGeom prst="rect">
-            <a:avLst/>
-          </a:prstGeom>
-          <a:noFill/>
-        </p:spPr>
-        <p:txBody>
-          <a:bodyPr wrap="square">
-            <a:spAutoFit/>
-          </a:bodyPr>
-          <a:lstStyle/>
-          <a:p>
-            <a:r>
-              <a:rPr sz="2800" b="1" i="0">
-                <a:solidFill>
-                  <a:srgbClr val="1A1A1A"/>
-                </a:solidFill>
-                <a:latin typeface="Arial"/>
-              </a:rPr>
-              <a:t>The recipe: five phases, six deliverables, four sign-offs</a:t>
-            </a:r>
-          </a:p>
-        </p:txBody>
-      </p:sp>
-      <p:sp>
-        <p:nvSpPr>
-          <p:cNvPr id="4" name="Oval 3"/>
+          <p:cNvPr id="13" name="Oval 12"/>
           <p:cNvSpPr/>
           <p:nvPr/>
         </p:nvSpPr>
         <p:spPr>
           <a:xfrm>
-            <a:off x="621792" y="1463040"/>
+            <a:off x="621792" y="3657600"/>
             <a:ext cx="310896" cy="310896"/>
           </a:xfrm>
           <a:prstGeom prst="ellipse">
@@ -12632,20 +12586,20 @@
                 </a:solidFill>
                 <a:latin typeface="Arial"/>
               </a:rPr>
-              <a:t>1</a:t>
-            </a:r>
-          </a:p>
-        </p:txBody>
-      </p:sp>
-      <p:sp>
-        <p:nvSpPr>
-          <p:cNvPr id="5" name="TextBox 4"/>
+              <a:t>4</a:t>
+            </a:r>
+          </a:p>
+        </p:txBody>
+      </p:sp>
+      <p:sp>
+        <p:nvSpPr>
+          <p:cNvPr id="14" name="TextBox 13"/>
           <p:cNvSpPr txBox="1"/>
           <p:nvPr/>
         </p:nvSpPr>
         <p:spPr>
           <a:xfrm>
-            <a:off x="1115568" y="1417320"/>
+            <a:off x="1115568" y="3611880"/>
             <a:ext cx="10527487" cy="685799"/>
           </a:xfrm>
           <a:prstGeom prst="rect">
@@ -12671,7 +12625,7 @@
                 </a:solidFill>
                 <a:latin typeface="Arial"/>
               </a:rPr>
-              <a:t>Discover</a:t>
+              <a:t>Plan, first half</a:t>
             </a:r>
           </a:p>
           <a:p>
@@ -12687,20 +12641,20 @@
                 </a:solidFill>
                 <a:latin typeface="Arial"/>
               </a:rPr>
-              <a:t>An honest picture of what exists today.</a:t>
-            </a:r>
-          </a:p>
-        </p:txBody>
-      </p:sp>
-      <p:sp>
-        <p:nvSpPr>
-          <p:cNvPr id="6" name="Rectangle 5"/>
+              <a:t>The target architecture — the designed future state.</a:t>
+            </a:r>
+          </a:p>
+        </p:txBody>
+      </p:sp>
+      <p:sp>
+        <p:nvSpPr>
+          <p:cNvPr id="15" name="Rectangle 14"/>
           <p:cNvSpPr/>
           <p:nvPr/>
         </p:nvSpPr>
         <p:spPr>
           <a:xfrm>
-            <a:off x="621792" y="2107692"/>
+            <a:off x="621792" y="4302252"/>
             <a:ext cx="10881360" cy="12700"/>
           </a:xfrm>
           <a:prstGeom prst="rect">
@@ -12738,13 +12692,13 @@
       </p:sp>
       <p:sp>
         <p:nvSpPr>
-          <p:cNvPr id="7" name="Oval 6"/>
+          <p:cNvPr id="16" name="Oval 15"/>
           <p:cNvSpPr/>
           <p:nvPr/>
         </p:nvSpPr>
         <p:spPr>
           <a:xfrm>
-            <a:off x="621792" y="2194560"/>
+            <a:off x="621792" y="4389120"/>
             <a:ext cx="310896" cy="310896"/>
           </a:xfrm>
           <a:prstGeom prst="ellipse">
@@ -12784,20 +12738,20 @@
                 </a:solidFill>
                 <a:latin typeface="Arial"/>
               </a:rPr>
-              <a:t>2</a:t>
-            </a:r>
-          </a:p>
-        </p:txBody>
-      </p:sp>
-      <p:sp>
-        <p:nvSpPr>
-          <p:cNvPr id="8" name="TextBox 7"/>
+              <a:t>5</a:t>
+            </a:r>
+          </a:p>
+        </p:txBody>
+      </p:sp>
+      <p:sp>
+        <p:nvSpPr>
+          <p:cNvPr id="17" name="TextBox 16"/>
           <p:cNvSpPr txBox="1"/>
           <p:nvPr/>
         </p:nvSpPr>
         <p:spPr>
           <a:xfrm>
-            <a:off x="1115568" y="2148840"/>
+            <a:off x="1115568" y="4343400"/>
             <a:ext cx="10527487" cy="685799"/>
           </a:xfrm>
           <a:prstGeom prst="rect">
@@ -12823,7 +12777,7 @@
                 </a:solidFill>
                 <a:latin typeface="Arial"/>
               </a:rPr>
-              <a:t>Assess</a:t>
+              <a:t>Plan, second half</a:t>
             </a:r>
           </a:p>
           <a:p>
@@ -12839,20 +12793,20 @@
                 </a:solidFill>
                 <a:latin typeface="Arial"/>
               </a:rPr>
-              <a:t>A ranked gap analysis.</a:t>
-            </a:r>
-          </a:p>
-        </p:txBody>
-      </p:sp>
-      <p:sp>
-        <p:nvSpPr>
-          <p:cNvPr id="9" name="Rectangle 8"/>
+              <a:t>The wave-sequenced, costed roadmap that reaches it.</a:t>
+            </a:r>
+          </a:p>
+        </p:txBody>
+      </p:sp>
+      <p:sp>
+        <p:nvSpPr>
+          <p:cNvPr id="18" name="Rectangle 17"/>
           <p:cNvSpPr/>
           <p:nvPr/>
         </p:nvSpPr>
         <p:spPr>
           <a:xfrm>
-            <a:off x="621792" y="2839212"/>
+            <a:off x="621792" y="5033772"/>
             <a:ext cx="10881360" cy="12700"/>
           </a:xfrm>
           <a:prstGeom prst="rect">
@@ -12890,13 +12844,13 @@
       </p:sp>
       <p:sp>
         <p:nvSpPr>
-          <p:cNvPr id="10" name="Oval 9"/>
+          <p:cNvPr id="19" name="Oval 18"/>
           <p:cNvSpPr/>
           <p:nvPr/>
         </p:nvSpPr>
         <p:spPr>
           <a:xfrm>
-            <a:off x="621792" y="2926079"/>
+            <a:off x="621792" y="5120640"/>
             <a:ext cx="310896" cy="310896"/>
           </a:xfrm>
           <a:prstGeom prst="ellipse">
@@ -12936,20 +12890,20 @@
                 </a:solidFill>
                 <a:latin typeface="Arial"/>
               </a:rPr>
-              <a:t>3</a:t>
-            </a:r>
-          </a:p>
-        </p:txBody>
-      </p:sp>
-      <p:sp>
-        <p:nvSpPr>
-          <p:cNvPr id="11" name="TextBox 10"/>
+              <a:t>6</a:t>
+            </a:r>
+          </a:p>
+        </p:txBody>
+      </p:sp>
+      <p:sp>
+        <p:nvSpPr>
+          <p:cNvPr id="20" name="TextBox 19"/>
           <p:cNvSpPr txBox="1"/>
           <p:nvPr/>
         </p:nvSpPr>
         <p:spPr>
           <a:xfrm>
-            <a:off x="1115568" y="2880360"/>
+            <a:off x="1115568" y="5074920"/>
             <a:ext cx="10527487" cy="685799"/>
           </a:xfrm>
           <a:prstGeom prst="rect">
@@ -12975,7 +12929,7 @@
                 </a:solidFill>
                 <a:latin typeface="Arial"/>
               </a:rPr>
-              <a:t>Adapt</a:t>
+              <a:t>Execute &amp; Govern</a:t>
             </a:r>
           </a:p>
           <a:p>
@@ -12991,27 +12945,113 @@
                 </a:solidFill>
                 <a:latin typeface="Arial"/>
               </a:rPr>
-              <a:t>A localised framework and a build-buy-share matrix.</a:t>
-            </a:r>
-          </a:p>
-        </p:txBody>
-      </p:sp>
-      <p:sp>
-        <p:nvSpPr>
-          <p:cNvPr id="12" name="Rectangle 11"/>
+              <a:t>A living, governed architecture.</a:t>
+            </a:r>
+          </a:p>
+        </p:txBody>
+      </p:sp>
+      <p:sp>
+        <p:nvSpPr>
+          <p:cNvPr id="21" name="TextBox 20"/>
+          <p:cNvSpPr txBox="1"/>
+          <p:nvPr/>
+        </p:nvSpPr>
+        <p:spPr>
+          <a:xfrm>
+            <a:off x="658368" y="5916168"/>
+            <a:ext cx="10881360" cy="548640"/>
+          </a:xfrm>
+          <a:prstGeom prst="rect">
+            <a:avLst/>
+          </a:prstGeom>
+          <a:noFill/>
+        </p:spPr>
+        <p:txBody>
+          <a:bodyPr wrap="square">
+            <a:spAutoFit/>
+          </a:bodyPr>
+          <a:lstStyle/>
+          <a:p>
+            <a:r>
+              <a:rPr sz="1550" b="1" i="0">
+                <a:solidFill>
+                  <a:srgbClr val="006E96"/>
+                </a:solidFill>
+                <a:latin typeface="Arial"/>
+              </a:rPr>
+              <a:t>A sign-off after each of the first four phases. That order is the method.</a:t>
+            </a:r>
+          </a:p>
+        </p:txBody>
+      </p:sp>
+      <p:sp>
+        <p:nvSpPr>
+          <p:cNvPr id="22" name="TextBox 21"/>
+          <p:cNvSpPr txBox="1"/>
+          <p:nvPr/>
+        </p:nvSpPr>
+        <p:spPr>
+          <a:xfrm>
+            <a:off x="457200" y="6473952"/>
+            <a:ext cx="7772400" cy="292608"/>
+          </a:xfrm>
+          <a:prstGeom prst="rect">
+            <a:avLst/>
+          </a:prstGeom>
+          <a:noFill/>
+        </p:spPr>
+        <p:txBody>
+          <a:bodyPr wrap="square">
+            <a:spAutoFit/>
+          </a:bodyPr>
+          <a:lstStyle/>
+          <a:p>
+            <a:r>
+              <a:rPr sz="900" b="0" i="0">
+                <a:solidFill>
+                  <a:srgbClr val="595959"/>
+                </a:solidFill>
+                <a:latin typeface="Arial"/>
+              </a:rPr>
+              <a:t>4.8 · Run this on your own sector — the transferable recipe</a:t>
+            </a:r>
+          </a:p>
+        </p:txBody>
+      </p:sp>
+    </p:spTree>
+  </p:cSld>
+  <p:clrMapOvr>
+    <a:masterClrMapping/>
+  </p:clrMapOvr>
+</p:sld>
+</file>
+
+<file path=ppt/slides/slide61.xml><?xml version="1.0" encoding="utf-8"?>
+<p:sld xmlns:a="http://schemas.openxmlformats.org/drawingml/2006/main" xmlns:p="http://schemas.openxmlformats.org/presentationml/2006/main" xmlns:r="http://schemas.openxmlformats.org/officeDocument/2006/relationships">
+  <p:cSld>
+    <p:spTree>
+      <p:nvGrpSpPr>
+        <p:cNvPr id="1" name=""/>
+        <p:cNvGrpSpPr/>
+        <p:nvPr/>
+      </p:nvGrpSpPr>
+      <p:grpSpPr/>
+      <p:sp>
+        <p:nvSpPr>
+          <p:cNvPr id="2" name="Rectangle 1"/>
           <p:cNvSpPr/>
           <p:nvPr/>
         </p:nvSpPr>
         <p:spPr>
           <a:xfrm>
-            <a:off x="621792" y="3570732"/>
-            <a:ext cx="10881360" cy="12700"/>
+            <a:off x="457200" y="384048"/>
+            <a:ext cx="45720" cy="256032"/>
           </a:xfrm>
           <a:prstGeom prst="rect">
             <a:avLst/>
           </a:prstGeom>
           <a:solidFill>
-            <a:srgbClr val="DDECF4"/>
+            <a:srgbClr val="009CD6"/>
           </a:solidFill>
           <a:ln>
             <a:noFill/>
@@ -13042,20 +13082,56 @@
       </p:sp>
       <p:sp>
         <p:nvSpPr>
-          <p:cNvPr id="13" name="Oval 12"/>
+          <p:cNvPr id="3" name="TextBox 2"/>
+          <p:cNvSpPr txBox="1"/>
+          <p:nvPr/>
+        </p:nvSpPr>
+        <p:spPr>
+          <a:xfrm>
+            <a:off x="621792" y="274320"/>
+            <a:ext cx="11247120" cy="914400"/>
+          </a:xfrm>
+          <a:prstGeom prst="rect">
+            <a:avLst/>
+          </a:prstGeom>
+          <a:noFill/>
+        </p:spPr>
+        <p:txBody>
+          <a:bodyPr wrap="square">
+            <a:spAutoFit/>
+          </a:bodyPr>
+          <a:lstStyle/>
+          <a:p>
+            <a:r>
+              <a:rPr sz="2800" b="1" i="0">
+                <a:solidFill>
+                  <a:srgbClr val="1A1A1A"/>
+                </a:solidFill>
+                <a:latin typeface="Arial"/>
+              </a:rPr>
+              <a:t>Swap the contents. Keep the method</a:t>
+            </a:r>
+          </a:p>
+        </p:txBody>
+      </p:sp>
+      <p:sp>
+        <p:nvSpPr>
+          <p:cNvPr id="4" name="Rounded Rectangle 3"/>
           <p:cNvSpPr/>
           <p:nvPr/>
         </p:nvSpPr>
         <p:spPr>
           <a:xfrm>
-            <a:off x="621792" y="3657600"/>
-            <a:ext cx="310896" cy="310896"/>
-          </a:xfrm>
-          <a:prstGeom prst="ellipse">
-            <a:avLst/>
+            <a:off x="658368" y="1554480"/>
+            <a:ext cx="5394960" cy="3977639"/>
+          </a:xfrm>
+          <a:prstGeom prst="roundRect">
+            <a:avLst>
+              <a:gd name="adj" fmla="val 4500"/>
+            </a:avLst>
           </a:prstGeom>
           <a:solidFill>
-            <a:srgbClr val="009CD6"/>
+            <a:srgbClr val="E5F5FB"/>
           </a:solidFill>
           <a:ln>
             <a:noFill/>
@@ -13077,32 +13153,23 @@
           </a:fontRef>
         </p:style>
         <p:txBody>
-          <a:bodyPr rtlCol="0" anchor="ctr" lIns="0" rIns="0" tIns="0" bIns="0" wrap="square"/>
+          <a:bodyPr rtlCol="0" anchor="ctr"/>
           <a:lstStyle/>
           <a:p>
             <a:pPr algn="ctr"/>
-            <a:r>
-              <a:rPr sz="1300" b="1" i="0">
-                <a:solidFill>
-                  <a:srgbClr val="FFFFFF"/>
-                </a:solidFill>
-                <a:latin typeface="Arial"/>
-              </a:rPr>
-              <a:t>4</a:t>
-            </a:r>
-          </a:p>
-        </p:txBody>
-      </p:sp>
-      <p:sp>
-        <p:nvSpPr>
-          <p:cNvPr id="14" name="TextBox 13"/>
+          </a:p>
+        </p:txBody>
+      </p:sp>
+      <p:sp>
+        <p:nvSpPr>
+          <p:cNvPr id="5" name="TextBox 4"/>
           <p:cNvSpPr txBox="1"/>
           <p:nvPr/>
         </p:nvSpPr>
         <p:spPr>
           <a:xfrm>
-            <a:off x="1115568" y="3611880"/>
-            <a:ext cx="10527487" cy="685799"/>
+            <a:off x="859536" y="1700784"/>
+            <a:ext cx="4992624" cy="3703320"/>
           </a:xfrm>
           <a:prstGeom prst="rect">
             <a:avLst/>
@@ -13117,53 +13184,87 @@
           <a:p>
             <a:pPr>
               <a:spcAft>
-                <a:spcPts val="300"/>
+                <a:spcPts val="700"/>
               </a:spcAft>
             </a:pPr>
             <a:r>
-              <a:rPr sz="1700" b="1" i="0">
+              <a:rPr sz="1900" b="1" i="0">
+                <a:solidFill>
+                  <a:srgbClr val="006E96"/>
+                </a:solidFill>
+                <a:latin typeface="Arial"/>
+              </a:rPr>
+              <a:t>WHAT CHANGES</a:t>
+            </a:r>
+          </a:p>
+          <a:p>
+            <a:pPr>
+              <a:spcAft>
+                <a:spcPts val="700"/>
+              </a:spcAft>
+            </a:pPr>
+            <a:r>
+              <a:rPr sz="1600" b="0" i="0">
                 <a:solidFill>
                   <a:srgbClr val="1A1A1A"/>
                 </a:solidFill>
                 <a:latin typeface="Arial"/>
               </a:rPr>
-              <a:t>Plan, first half</a:t>
+              <a:t>The institutions — your ministry, your authorities, your registries.</a:t>
             </a:r>
           </a:p>
           <a:p>
             <a:pPr>
               <a:spcAft>
-                <a:spcPts val="300"/>
+                <a:spcPts val="700"/>
               </a:spcAft>
             </a:pPr>
             <a:r>
-              <a:rPr sz="1550" b="0" i="0">
+              <a:rPr sz="1600" b="0" i="0">
                 <a:solidFill>
-                  <a:srgbClr val="595959"/>
+                  <a:srgbClr val="1A1A1A"/>
                 </a:solidFill>
                 <a:latin typeface="Arial"/>
               </a:rPr>
-              <a:t>The target architecture — the designed future state.</a:t>
-            </a:r>
-          </a:p>
-        </p:txBody>
-      </p:sp>
-      <p:sp>
-        <p:nvSpPr>
-          <p:cNvPr id="15" name="Rectangle 14"/>
+              <a:t>The data domains — a patient, a farmer, a taxpayer instead of a learner.</a:t>
+            </a:r>
+          </a:p>
+          <a:p>
+            <a:pPr>
+              <a:spcAft>
+                <a:spcPts val="700"/>
+              </a:spcAft>
+            </a:pPr>
+            <a:r>
+              <a:rPr sz="1600" b="0" i="0">
+                <a:solidFill>
+                  <a:srgbClr val="1A1A1A"/>
+                </a:solidFill>
+                <a:latin typeface="Arial"/>
+              </a:rPr>
+              <a:t>The specific gaps you find.</a:t>
+            </a:r>
+          </a:p>
+        </p:txBody>
+      </p:sp>
+      <p:sp>
+        <p:nvSpPr>
+          <p:cNvPr id="6" name="Rounded Rectangle 5"/>
           <p:cNvSpPr/>
           <p:nvPr/>
         </p:nvSpPr>
         <p:spPr>
           <a:xfrm>
-            <a:off x="621792" y="4302252"/>
-            <a:ext cx="10881360" cy="12700"/>
-          </a:xfrm>
-          <a:prstGeom prst="rect">
-            <a:avLst/>
+            <a:off x="6263640" y="1554480"/>
+            <a:ext cx="5394960" cy="3977639"/>
+          </a:xfrm>
+          <a:prstGeom prst="roundRect">
+            <a:avLst>
+              <a:gd name="adj" fmla="val 4500"/>
+            </a:avLst>
           </a:prstGeom>
           <a:solidFill>
-            <a:srgbClr val="DDECF4"/>
+            <a:srgbClr val="F2F2F2"/>
           </a:solidFill>
           <a:ln>
             <a:noFill/>
@@ -13194,16 +13295,221 @@
       </p:sp>
       <p:sp>
         <p:nvSpPr>
-          <p:cNvPr id="16" name="Oval 15"/>
+          <p:cNvPr id="7" name="TextBox 6"/>
+          <p:cNvSpPr txBox="1"/>
+          <p:nvPr/>
+        </p:nvSpPr>
+        <p:spPr>
+          <a:xfrm>
+            <a:off x="6464808" y="1700784"/>
+            <a:ext cx="4992624" cy="3703320"/>
+          </a:xfrm>
+          <a:prstGeom prst="rect">
+            <a:avLst/>
+          </a:prstGeom>
+          <a:noFill/>
+        </p:spPr>
+        <p:txBody>
+          <a:bodyPr wrap="square">
+            <a:spAutoFit/>
+          </a:bodyPr>
+          <a:lstStyle/>
+          <a:p>
+            <a:pPr>
+              <a:spcAft>
+                <a:spcPts val="700"/>
+              </a:spcAft>
+            </a:pPr>
+            <a:r>
+              <a:rPr sz="1900" b="1" i="0">
+                <a:solidFill>
+                  <a:srgbClr val="006E96"/>
+                </a:solidFill>
+                <a:latin typeface="Arial"/>
+              </a:rPr>
+              <a:t>WHAT DOES NOT</a:t>
+            </a:r>
+          </a:p>
+          <a:p>
+            <a:pPr>
+              <a:spcAft>
+                <a:spcPts val="700"/>
+              </a:spcAft>
+            </a:pPr>
+            <a:r>
+              <a:rPr sz="1600" b="0" i="0">
+                <a:solidFill>
+                  <a:srgbClr val="1A1A1A"/>
+                </a:solidFill>
+                <a:latin typeface="Arial"/>
+              </a:rPr>
+              <a:t>The five phases.</a:t>
+            </a:r>
+          </a:p>
+          <a:p>
+            <a:pPr>
+              <a:spcAft>
+                <a:spcPts val="700"/>
+              </a:spcAft>
+            </a:pPr>
+            <a:r>
+              <a:rPr sz="1600" b="0" i="0">
+                <a:solidFill>
+                  <a:srgbClr val="1A1A1A"/>
+                </a:solidFill>
+                <a:latin typeface="Arial"/>
+              </a:rPr>
+              <a:t>The four sign-offs.</a:t>
+            </a:r>
+          </a:p>
+          <a:p>
+            <a:pPr>
+              <a:spcAft>
+                <a:spcPts val="700"/>
+              </a:spcAft>
+            </a:pPr>
+            <a:r>
+              <a:rPr sz="1600" b="0" i="0">
+                <a:solidFill>
+                  <a:srgbClr val="1A1A1A"/>
+                </a:solidFill>
+                <a:latin typeface="Arial"/>
+              </a:rPr>
+              <a:t>The six deliverables.</a:t>
+            </a:r>
+          </a:p>
+          <a:p>
+            <a:pPr>
+              <a:spcAft>
+                <a:spcPts val="700"/>
+              </a:spcAft>
+            </a:pPr>
+            <a:r>
+              <a:rPr sz="1600" b="0" i="0">
+                <a:solidFill>
+                  <a:srgbClr val="1A1A1A"/>
+                </a:solidFill>
+                <a:latin typeface="Arial"/>
+              </a:rPr>
+              <a:t>Reuse before build.</a:t>
+            </a:r>
+          </a:p>
+          <a:p>
+            <a:pPr>
+              <a:spcAft>
+                <a:spcPts val="700"/>
+              </a:spcAft>
+            </a:pPr>
+            <a:r>
+              <a:rPr sz="1600" b="0" i="0">
+                <a:solidFill>
+                  <a:srgbClr val="1A1A1A"/>
+                </a:solidFill>
+                <a:latin typeface="Arial"/>
+              </a:rPr>
+              <a:t>The binding Board.</a:t>
+            </a:r>
+          </a:p>
+        </p:txBody>
+      </p:sp>
+      <p:sp>
+        <p:nvSpPr>
+          <p:cNvPr id="8" name="TextBox 7"/>
+          <p:cNvSpPr txBox="1"/>
+          <p:nvPr/>
+        </p:nvSpPr>
+        <p:spPr>
+          <a:xfrm>
+            <a:off x="658368" y="5715000"/>
+            <a:ext cx="10881360" cy="548640"/>
+          </a:xfrm>
+          <a:prstGeom prst="rect">
+            <a:avLst/>
+          </a:prstGeom>
+          <a:noFill/>
+        </p:spPr>
+        <p:txBody>
+          <a:bodyPr wrap="square">
+            <a:spAutoFit/>
+          </a:bodyPr>
+          <a:lstStyle/>
+          <a:p>
+            <a:r>
+              <a:rPr sz="1550" b="1" i="0">
+                <a:solidFill>
+                  <a:srgbClr val="006E96"/>
+                </a:solidFill>
+                <a:latin typeface="Arial"/>
+              </a:rPr>
+              <a:t>The contents are yours. The method is the same one you just watched.</a:t>
+            </a:r>
+          </a:p>
+        </p:txBody>
+      </p:sp>
+      <p:sp>
+        <p:nvSpPr>
+          <p:cNvPr id="9" name="TextBox 8"/>
+          <p:cNvSpPr txBox="1"/>
+          <p:nvPr/>
+        </p:nvSpPr>
+        <p:spPr>
+          <a:xfrm>
+            <a:off x="457200" y="6473952"/>
+            <a:ext cx="7772400" cy="292608"/>
+          </a:xfrm>
+          <a:prstGeom prst="rect">
+            <a:avLst/>
+          </a:prstGeom>
+          <a:noFill/>
+        </p:spPr>
+        <p:txBody>
+          <a:bodyPr wrap="square">
+            <a:spAutoFit/>
+          </a:bodyPr>
+          <a:lstStyle/>
+          <a:p>
+            <a:r>
+              <a:rPr sz="900" b="0" i="0">
+                <a:solidFill>
+                  <a:srgbClr val="595959"/>
+                </a:solidFill>
+                <a:latin typeface="Arial"/>
+              </a:rPr>
+              <a:t>4.8 · Run this on your own sector — the transferable recipe</a:t>
+            </a:r>
+          </a:p>
+        </p:txBody>
+      </p:sp>
+    </p:spTree>
+  </p:cSld>
+  <p:clrMapOvr>
+    <a:masterClrMapping/>
+  </p:clrMapOvr>
+</p:sld>
+</file>
+
+<file path=ppt/slides/slide62.xml><?xml version="1.0" encoding="utf-8"?>
+<p:sld xmlns:a="http://schemas.openxmlformats.org/drawingml/2006/main" xmlns:p="http://schemas.openxmlformats.org/presentationml/2006/main" xmlns:r="http://schemas.openxmlformats.org/officeDocument/2006/relationships">
+  <p:cSld>
+    <p:spTree>
+      <p:nvGrpSpPr>
+        <p:cNvPr id="1" name=""/>
+        <p:cNvGrpSpPr/>
+        <p:nvPr/>
+      </p:nvGrpSpPr>
+      <p:grpSpPr/>
+      <p:sp>
+        <p:nvSpPr>
+          <p:cNvPr id="2" name="Rectangle 1"/>
           <p:cNvSpPr/>
           <p:nvPr/>
         </p:nvSpPr>
         <p:spPr>
           <a:xfrm>
-            <a:off x="621792" y="4389120"/>
-            <a:ext cx="310896" cy="310896"/>
-          </a:xfrm>
-          <a:prstGeom prst="ellipse">
+            <a:off x="457200" y="384048"/>
+            <a:ext cx="45720" cy="256032"/>
+          </a:xfrm>
+          <a:prstGeom prst="rect">
             <a:avLst/>
           </a:prstGeom>
           <a:solidFill>
@@ -13229,32 +13535,23 @@
           </a:fontRef>
         </p:style>
         <p:txBody>
-          <a:bodyPr rtlCol="0" anchor="ctr" lIns="0" rIns="0" tIns="0" bIns="0" wrap="square"/>
+          <a:bodyPr rtlCol="0" anchor="ctr"/>
           <a:lstStyle/>
           <a:p>
             <a:pPr algn="ctr"/>
-            <a:r>
-              <a:rPr sz="1300" b="1" i="0">
-                <a:solidFill>
-                  <a:srgbClr val="FFFFFF"/>
-                </a:solidFill>
-                <a:latin typeface="Arial"/>
-              </a:rPr>
-              <a:t>5</a:t>
-            </a:r>
-          </a:p>
-        </p:txBody>
-      </p:sp>
-      <p:sp>
-        <p:nvSpPr>
-          <p:cNvPr id="17" name="TextBox 16"/>
+          </a:p>
+        </p:txBody>
+      </p:sp>
+      <p:sp>
+        <p:nvSpPr>
+          <p:cNvPr id="3" name="TextBox 2"/>
           <p:cNvSpPr txBox="1"/>
           <p:nvPr/>
         </p:nvSpPr>
         <p:spPr>
           <a:xfrm>
-            <a:off x="1115568" y="4343400"/>
-            <a:ext cx="10527487" cy="685799"/>
+            <a:off x="621792" y="274320"/>
+            <a:ext cx="11247120" cy="914400"/>
           </a:xfrm>
           <a:prstGeom prst="rect">
             <a:avLst/>
@@ -13267,55 +13564,75 @@
           </a:bodyPr>
           <a:lstStyle/>
           <a:p>
-            <a:pPr>
-              <a:spcAft>
-                <a:spcPts val="300"/>
-              </a:spcAft>
-            </a:pPr>
-            <a:r>
-              <a:rPr sz="1700" b="1" i="0">
+            <a:r>
+              <a:rPr sz="2800" b="1" i="0">
                 <a:solidFill>
                   <a:srgbClr val="1A1A1A"/>
                 </a:solidFill>
                 <a:latin typeface="Arial"/>
               </a:rPr>
-              <a:t>Plan, second half</a:t>
-            </a:r>
-          </a:p>
+              <a:t>The method travels — and the second sector is cheaper than the first</a:t>
+            </a:r>
+          </a:p>
+        </p:txBody>
+      </p:sp>
+      <p:sp>
+        <p:nvSpPr>
+          <p:cNvPr id="4" name="TextBox 3"/>
+          <p:cNvSpPr txBox="1"/>
+          <p:nvPr/>
+        </p:nvSpPr>
+        <p:spPr>
+          <a:xfrm>
+            <a:off x="658368" y="1600200"/>
+            <a:ext cx="10881360" cy="1508760"/>
+          </a:xfrm>
+          <a:prstGeom prst="rect">
+            <a:avLst/>
+          </a:prstGeom>
+          <a:noFill/>
+        </p:spPr>
+        <p:txBody>
+          <a:bodyPr wrap="square">
+            <a:spAutoFit/>
+          </a:bodyPr>
+          <a:lstStyle/>
           <a:p>
             <a:pPr>
               <a:spcAft>
-                <a:spcPts val="300"/>
+                <a:spcPts val="1200"/>
               </a:spcAft>
             </a:pPr>
             <a:r>
-              <a:rPr sz="1550" b="0" i="0">
+              <a:rPr sz="2000" b="0" i="0">
                 <a:solidFill>
-                  <a:srgbClr val="595959"/>
+                  <a:srgbClr val="1A1A1A"/>
                 </a:solidFill>
                 <a:latin typeface="Arial"/>
               </a:rPr>
-              <a:t>The wave-sequenced, costed roadmap that reaches it.</a:t>
-            </a:r>
-          </a:p>
-        </p:txBody>
-      </p:sp>
-      <p:sp>
-        <p:nvSpPr>
-          <p:cNvPr id="18" name="Rectangle 17"/>
+              <a:t>The same five phases run on health (a patient record), agriculture (a farmer registry), social protection (a beneficiary record). Same shapes, same steps.</a:t>
+            </a:r>
+          </a:p>
+        </p:txBody>
+      </p:sp>
+      <p:sp>
+        <p:nvSpPr>
+          <p:cNvPr id="5" name="Rounded Rectangle 4"/>
           <p:cNvSpPr/>
           <p:nvPr/>
         </p:nvSpPr>
         <p:spPr>
           <a:xfrm>
-            <a:off x="621792" y="5033772"/>
-            <a:ext cx="10881360" cy="12700"/>
-          </a:xfrm>
-          <a:prstGeom prst="rect">
-            <a:avLst/>
+            <a:off x="658368" y="3291840"/>
+            <a:ext cx="10881360" cy="1325880"/>
+          </a:xfrm>
+          <a:prstGeom prst="roundRect">
+            <a:avLst>
+              <a:gd name="adj" fmla="val 4500"/>
+            </a:avLst>
           </a:prstGeom>
           <a:solidFill>
-            <a:srgbClr val="DDECF4"/>
+            <a:srgbClr val="E5F5FB"/>
           </a:solidFill>
           <a:ln>
             <a:noFill/>
@@ -13346,16 +13663,107 @@
       </p:sp>
       <p:sp>
         <p:nvSpPr>
-          <p:cNvPr id="19" name="Oval 18"/>
+          <p:cNvPr id="6" name="TextBox 5"/>
+          <p:cNvSpPr txBox="1"/>
+          <p:nvPr/>
+        </p:nvSpPr>
+        <p:spPr>
+          <a:xfrm>
+            <a:off x="859536" y="3483864"/>
+            <a:ext cx="10479024" cy="1051560"/>
+          </a:xfrm>
+          <a:prstGeom prst="rect">
+            <a:avLst/>
+          </a:prstGeom>
+          <a:noFill/>
+        </p:spPr>
+        <p:txBody>
+          <a:bodyPr wrap="square">
+            <a:spAutoFit/>
+          </a:bodyPr>
+          <a:lstStyle/>
+          <a:p>
+            <a:pPr>
+              <a:spcAft>
+                <a:spcPts val="700"/>
+              </a:spcAft>
+            </a:pPr>
+            <a:r>
+              <a:rPr sz="2300" b="1" i="0">
+                <a:solidFill>
+                  <a:srgbClr val="006E96"/>
+                </a:solidFill>
+                <a:latin typeface="Arial"/>
+              </a:rPr>
+              <a:t>The team, the framework and the governance are already there.</a:t>
+            </a:r>
+          </a:p>
+        </p:txBody>
+      </p:sp>
+      <p:sp>
+        <p:nvSpPr>
+          <p:cNvPr id="7" name="TextBox 6"/>
+          <p:cNvSpPr txBox="1"/>
+          <p:nvPr/>
+        </p:nvSpPr>
+        <p:spPr>
+          <a:xfrm>
+            <a:off x="457200" y="6473952"/>
+            <a:ext cx="7772400" cy="292608"/>
+          </a:xfrm>
+          <a:prstGeom prst="rect">
+            <a:avLst/>
+          </a:prstGeom>
+          <a:noFill/>
+        </p:spPr>
+        <p:txBody>
+          <a:bodyPr wrap="square">
+            <a:spAutoFit/>
+          </a:bodyPr>
+          <a:lstStyle/>
+          <a:p>
+            <a:r>
+              <a:rPr sz="900" b="0" i="0">
+                <a:solidFill>
+                  <a:srgbClr val="595959"/>
+                </a:solidFill>
+                <a:latin typeface="Arial"/>
+              </a:rPr>
+              <a:t>4.8 · Run this on your own sector — the transferable recipe</a:t>
+            </a:r>
+          </a:p>
+        </p:txBody>
+      </p:sp>
+    </p:spTree>
+  </p:cSld>
+  <p:clrMapOvr>
+    <a:masterClrMapping/>
+  </p:clrMapOvr>
+</p:sld>
+</file>
+
+<file path=ppt/slides/slide63.xml><?xml version="1.0" encoding="utf-8"?>
+<p:sld xmlns:a="http://schemas.openxmlformats.org/drawingml/2006/main" xmlns:p="http://schemas.openxmlformats.org/presentationml/2006/main" xmlns:r="http://schemas.openxmlformats.org/officeDocument/2006/relationships">
+  <p:cSld>
+    <p:spTree>
+      <p:nvGrpSpPr>
+        <p:cNvPr id="1" name=""/>
+        <p:cNvGrpSpPr/>
+        <p:nvPr/>
+      </p:nvGrpSpPr>
+      <p:grpSpPr/>
+      <p:sp>
+        <p:nvSpPr>
+          <p:cNvPr id="2" name="Rectangle 1"/>
           <p:cNvSpPr/>
           <p:nvPr/>
         </p:nvSpPr>
         <p:spPr>
           <a:xfrm>
-            <a:off x="621792" y="5120640"/>
-            <a:ext cx="310896" cy="310896"/>
-          </a:xfrm>
-          <a:prstGeom prst="ellipse">
+            <a:off x="457200" y="384048"/>
+            <a:ext cx="45720" cy="256032"/>
+          </a:xfrm>
+          <a:prstGeom prst="rect">
             <a:avLst/>
           </a:prstGeom>
           <a:solidFill>
@@ -13381,32 +13789,23 @@
           </a:fontRef>
         </p:style>
         <p:txBody>
-          <a:bodyPr rtlCol="0" anchor="ctr" lIns="0" rIns="0" tIns="0" bIns="0" wrap="square"/>
+          <a:bodyPr rtlCol="0" anchor="ctr"/>
           <a:lstStyle/>
           <a:p>
             <a:pPr algn="ctr"/>
-            <a:r>
-              <a:rPr sz="1300" b="1" i="0">
-                <a:solidFill>
-                  <a:srgbClr val="FFFFFF"/>
-                </a:solidFill>
-                <a:latin typeface="Arial"/>
-              </a:rPr>
-              <a:t>6</a:t>
-            </a:r>
-          </a:p>
-        </p:txBody>
-      </p:sp>
-      <p:sp>
-        <p:nvSpPr>
-          <p:cNvPr id="20" name="TextBox 19"/>
+          </a:p>
+        </p:txBody>
+      </p:sp>
+      <p:sp>
+        <p:nvSpPr>
+          <p:cNvPr id="3" name="TextBox 2"/>
           <p:cNvSpPr txBox="1"/>
           <p:nvPr/>
         </p:nvSpPr>
         <p:spPr>
           <a:xfrm>
-            <a:off x="1115568" y="5074920"/>
-            <a:ext cx="10527487" cy="685799"/>
+            <a:off x="621792" y="274320"/>
+            <a:ext cx="11247120" cy="914400"/>
           </a:xfrm>
           <a:prstGeom prst="rect">
             <a:avLst/>
@@ -13419,137 +13818,30 @@
           </a:bodyPr>
           <a:lstStyle/>
           <a:p>
-            <a:pPr>
-              <a:spcAft>
-                <a:spcPts val="300"/>
-              </a:spcAft>
-            </a:pPr>
-            <a:r>
-              <a:rPr sz="1700" b="1" i="0">
+            <a:r>
+              <a:rPr sz="2800" b="1" i="0">
                 <a:solidFill>
                   <a:srgbClr val="1A1A1A"/>
                 </a:solidFill>
                 <a:latin typeface="Arial"/>
               </a:rPr>
-              <a:t>Execute &amp; Govern</a:t>
-            </a:r>
-          </a:p>
-          <a:p>
-            <a:pPr>
-              <a:spcAft>
-                <a:spcPts val="300"/>
-              </a:spcAft>
-            </a:pPr>
-            <a:r>
-              <a:rPr sz="1550" b="0" i="0">
-                <a:solidFill>
-                  <a:srgbClr val="595959"/>
-                </a:solidFill>
-                <a:latin typeface="Arial"/>
-              </a:rPr>
-              <a:t>A living, governed architecture.</a:t>
-            </a:r>
-          </a:p>
-        </p:txBody>
-      </p:sp>
-      <p:sp>
-        <p:nvSpPr>
-          <p:cNvPr id="21" name="TextBox 20"/>
-          <p:cNvSpPr txBox="1"/>
-          <p:nvPr/>
-        </p:nvSpPr>
-        <p:spPr>
-          <a:xfrm>
-            <a:off x="658368" y="5916168"/>
-            <a:ext cx="10881360" cy="548640"/>
-          </a:xfrm>
-          <a:prstGeom prst="rect">
-            <a:avLst/>
-          </a:prstGeom>
-          <a:noFill/>
-        </p:spPr>
-        <p:txBody>
-          <a:bodyPr wrap="square">
-            <a:spAutoFit/>
-          </a:bodyPr>
-          <a:lstStyle/>
-          <a:p>
-            <a:r>
-              <a:rPr sz="1550" b="1" i="0">
-                <a:solidFill>
-                  <a:srgbClr val="006E96"/>
-                </a:solidFill>
-                <a:latin typeface="Arial"/>
-              </a:rPr>
-              <a:t>A sign-off after each of the first four phases. That order is the method.</a:t>
-            </a:r>
-          </a:p>
-        </p:txBody>
-      </p:sp>
-      <p:sp>
-        <p:nvSpPr>
-          <p:cNvPr id="22" name="TextBox 21"/>
-          <p:cNvSpPr txBox="1"/>
-          <p:nvPr/>
-        </p:nvSpPr>
-        <p:spPr>
-          <a:xfrm>
-            <a:off x="457200" y="6473952"/>
-            <a:ext cx="7772400" cy="292608"/>
-          </a:xfrm>
-          <a:prstGeom prst="rect">
-            <a:avLst/>
-          </a:prstGeom>
-          <a:noFill/>
-        </p:spPr>
-        <p:txBody>
-          <a:bodyPr wrap="square">
-            <a:spAutoFit/>
-          </a:bodyPr>
-          <a:lstStyle/>
-          <a:p>
-            <a:r>
-              <a:rPr sz="900" b="0" i="0">
-                <a:solidFill>
-                  <a:srgbClr val="595959"/>
-                </a:solidFill>
-                <a:latin typeface="Arial"/>
-              </a:rPr>
-              <a:t>4.8 · Run this on your own sector — the transferable recipe</a:t>
-            </a:r>
-          </a:p>
-        </p:txBody>
-      </p:sp>
-    </p:spTree>
-  </p:cSld>
-  <p:clrMapOvr>
-    <a:masterClrMapping/>
-  </p:clrMapOvr>
-</p:sld>
-</file>
-
-<file path=ppt/slides/slide53.xml><?xml version="1.0" encoding="utf-8"?>
-<p:sld xmlns:a="http://schemas.openxmlformats.org/drawingml/2006/main" xmlns:p="http://schemas.openxmlformats.org/presentationml/2006/main" xmlns:r="http://schemas.openxmlformats.org/officeDocument/2006/relationships">
-  <p:cSld>
-    <p:spTree>
-      <p:nvGrpSpPr>
-        <p:cNvPr id="1" name=""/>
-        <p:cNvGrpSpPr/>
-        <p:nvPr/>
-      </p:nvGrpSpPr>
-      <p:grpSpPr/>
-      <p:sp>
-        <p:nvSpPr>
-          <p:cNvPr id="2" name="Rectangle 1"/>
+              <a:t>Three things to carry from Progressa into your own sector</a:t>
+            </a:r>
+          </a:p>
+        </p:txBody>
+      </p:sp>
+      <p:sp>
+        <p:nvSpPr>
+          <p:cNvPr id="4" name="Oval 3"/>
           <p:cNvSpPr/>
           <p:nvPr/>
         </p:nvSpPr>
         <p:spPr>
           <a:xfrm>
-            <a:off x="457200" y="384048"/>
-            <a:ext cx="45720" cy="256032"/>
-          </a:xfrm>
-          <a:prstGeom prst="rect">
+            <a:off x="621792" y="1508760"/>
+            <a:ext cx="310896" cy="310896"/>
+          </a:xfrm>
+          <a:prstGeom prst="ellipse">
             <a:avLst/>
           </a:prstGeom>
           <a:solidFill>
@@ -13575,23 +13867,32 @@
           </a:fontRef>
         </p:style>
         <p:txBody>
-          <a:bodyPr rtlCol="0" anchor="ctr"/>
+          <a:bodyPr rtlCol="0" anchor="ctr" lIns="0" rIns="0" tIns="0" bIns="0" wrap="square"/>
           <a:lstStyle/>
           <a:p>
             <a:pPr algn="ctr"/>
-          </a:p>
-        </p:txBody>
-      </p:sp>
-      <p:sp>
-        <p:nvSpPr>
-          <p:cNvPr id="3" name="TextBox 2"/>
+            <a:r>
+              <a:rPr sz="1300" b="1" i="0">
+                <a:solidFill>
+                  <a:srgbClr val="FFFFFF"/>
+                </a:solidFill>
+                <a:latin typeface="Arial"/>
+              </a:rPr>
+              <a:t>1</a:t>
+            </a:r>
+          </a:p>
+        </p:txBody>
+      </p:sp>
+      <p:sp>
+        <p:nvSpPr>
+          <p:cNvPr id="5" name="TextBox 4"/>
           <p:cNvSpPr txBox="1"/>
           <p:nvPr/>
         </p:nvSpPr>
         <p:spPr>
           <a:xfrm>
-            <a:off x="621792" y="274320"/>
-            <a:ext cx="11247120" cy="914400"/>
+            <a:off x="1115568" y="1463040"/>
+            <a:ext cx="10527487" cy="1386839"/>
           </a:xfrm>
           <a:prstGeom prst="rect">
             <a:avLst/>
@@ -13604,36 +13905,55 @@
           </a:bodyPr>
           <a:lstStyle/>
           <a:p>
-            <a:r>
-              <a:rPr sz="2800" b="1" i="0">
+            <a:pPr>
+              <a:spcAft>
+                <a:spcPts val="300"/>
+              </a:spcAft>
+            </a:pPr>
+            <a:r>
+              <a:rPr sz="1900" b="1" i="0">
                 <a:solidFill>
                   <a:srgbClr val="1A1A1A"/>
                 </a:solidFill>
                 <a:latin typeface="Arial"/>
               </a:rPr>
-              <a:t>Swap the contents. Keep the method</a:t>
-            </a:r>
-          </a:p>
-        </p:txBody>
-      </p:sp>
-      <p:sp>
-        <p:nvSpPr>
-          <p:cNvPr id="4" name="Rounded Rectangle 3"/>
+              <a:t>Start small</a:t>
+            </a:r>
+          </a:p>
+          <a:p>
+            <a:pPr>
+              <a:spcAft>
+                <a:spcPts val="300"/>
+              </a:spcAft>
+            </a:pPr>
+            <a:r>
+              <a:rPr sz="1550" b="0" i="0">
+                <a:solidFill>
+                  <a:srgbClr val="595959"/>
+                </a:solidFill>
+                <a:latin typeface="Arial"/>
+              </a:rPr>
+              <a:t>Pick the one high-priority use case and make it land in an early wave.</a:t>
+            </a:r>
+          </a:p>
+        </p:txBody>
+      </p:sp>
+      <p:sp>
+        <p:nvSpPr>
+          <p:cNvPr id="6" name="Rectangle 5"/>
           <p:cNvSpPr/>
           <p:nvPr/>
         </p:nvSpPr>
         <p:spPr>
           <a:xfrm>
-            <a:off x="658368" y="1554480"/>
-            <a:ext cx="5394960" cy="3977639"/>
-          </a:xfrm>
-          <a:prstGeom prst="roundRect">
-            <a:avLst>
-              <a:gd name="adj" fmla="val 4500"/>
-            </a:avLst>
+            <a:off x="621792" y="2854452"/>
+            <a:ext cx="10881360" cy="12700"/>
+          </a:xfrm>
+          <a:prstGeom prst="rect">
+            <a:avLst/>
           </a:prstGeom>
           <a:solidFill>
-            <a:srgbClr val="E5F5FB"/>
+            <a:srgbClr val="DDECF4"/>
           </a:solidFill>
           <a:ln>
             <a:noFill/>
@@ -13664,109 +13984,20 @@
       </p:sp>
       <p:sp>
         <p:nvSpPr>
-          <p:cNvPr id="5" name="TextBox 4"/>
-          <p:cNvSpPr txBox="1"/>
+          <p:cNvPr id="7" name="Oval 6"/>
+          <p:cNvSpPr/>
           <p:nvPr/>
         </p:nvSpPr>
         <p:spPr>
           <a:xfrm>
-            <a:off x="859536" y="1700784"/>
-            <a:ext cx="4992624" cy="3703320"/>
-          </a:xfrm>
-          <a:prstGeom prst="rect">
+            <a:off x="621792" y="2941319"/>
+            <a:ext cx="310896" cy="310896"/>
+          </a:xfrm>
+          <a:prstGeom prst="ellipse">
             <a:avLst/>
           </a:prstGeom>
-          <a:noFill/>
-        </p:spPr>
-        <p:txBody>
-          <a:bodyPr wrap="square">
-            <a:spAutoFit/>
-          </a:bodyPr>
-          <a:lstStyle/>
-          <a:p>
-            <a:pPr>
-              <a:spcAft>
-                <a:spcPts val="700"/>
-              </a:spcAft>
-            </a:pPr>
-            <a:r>
-              <a:rPr sz="1900" b="1" i="0">
-                <a:solidFill>
-                  <a:srgbClr val="006E96"/>
-                </a:solidFill>
-                <a:latin typeface="Arial"/>
-              </a:rPr>
-              <a:t>WHAT CHANGES</a:t>
-            </a:r>
-          </a:p>
-          <a:p>
-            <a:pPr>
-              <a:spcAft>
-                <a:spcPts val="700"/>
-              </a:spcAft>
-            </a:pPr>
-            <a:r>
-              <a:rPr sz="1600" b="0" i="0">
-                <a:solidFill>
-                  <a:srgbClr val="1A1A1A"/>
-                </a:solidFill>
-                <a:latin typeface="Arial"/>
-              </a:rPr>
-              <a:t>The institutions — your ministry, your authorities, your registries.</a:t>
-            </a:r>
-          </a:p>
-          <a:p>
-            <a:pPr>
-              <a:spcAft>
-                <a:spcPts val="700"/>
-              </a:spcAft>
-            </a:pPr>
-            <a:r>
-              <a:rPr sz="1600" b="0" i="0">
-                <a:solidFill>
-                  <a:srgbClr val="1A1A1A"/>
-                </a:solidFill>
-                <a:latin typeface="Arial"/>
-              </a:rPr>
-              <a:t>The data domains — a patient, a farmer, a taxpayer instead of a learner.</a:t>
-            </a:r>
-          </a:p>
-          <a:p>
-            <a:pPr>
-              <a:spcAft>
-                <a:spcPts val="700"/>
-              </a:spcAft>
-            </a:pPr>
-            <a:r>
-              <a:rPr sz="1600" b="0" i="0">
-                <a:solidFill>
-                  <a:srgbClr val="1A1A1A"/>
-                </a:solidFill>
-                <a:latin typeface="Arial"/>
-              </a:rPr>
-              <a:t>The specific gaps you find.</a:t>
-            </a:r>
-          </a:p>
-        </p:txBody>
-      </p:sp>
-      <p:sp>
-        <p:nvSpPr>
-          <p:cNvPr id="6" name="Rounded Rectangle 5"/>
-          <p:cNvSpPr/>
-          <p:nvPr/>
-        </p:nvSpPr>
-        <p:spPr>
-          <a:xfrm>
-            <a:off x="6263640" y="1554480"/>
-            <a:ext cx="5394960" cy="3977639"/>
-          </a:xfrm>
-          <a:prstGeom prst="roundRect">
-            <a:avLst>
-              <a:gd name="adj" fmla="val 4500"/>
-            </a:avLst>
-          </a:prstGeom>
           <a:solidFill>
-            <a:srgbClr val="F2F2F2"/>
+            <a:srgbClr val="009CD6"/>
           </a:solidFill>
           <a:ln>
             <a:noFill/>
@@ -13788,23 +14019,32 @@
           </a:fontRef>
         </p:style>
         <p:txBody>
-          <a:bodyPr rtlCol="0" anchor="ctr"/>
+          <a:bodyPr rtlCol="0" anchor="ctr" lIns="0" rIns="0" tIns="0" bIns="0" wrap="square"/>
           <a:lstStyle/>
           <a:p>
             <a:pPr algn="ctr"/>
-          </a:p>
-        </p:txBody>
-      </p:sp>
-      <p:sp>
-        <p:nvSpPr>
-          <p:cNvPr id="7" name="TextBox 6"/>
+            <a:r>
+              <a:rPr sz="1300" b="1" i="0">
+                <a:solidFill>
+                  <a:srgbClr val="FFFFFF"/>
+                </a:solidFill>
+                <a:latin typeface="Arial"/>
+              </a:rPr>
+              <a:t>2</a:t>
+            </a:r>
+          </a:p>
+        </p:txBody>
+      </p:sp>
+      <p:sp>
+        <p:nvSpPr>
+          <p:cNvPr id="8" name="TextBox 7"/>
           <p:cNvSpPr txBox="1"/>
           <p:nvPr/>
         </p:nvSpPr>
         <p:spPr>
           <a:xfrm>
-            <a:off x="6464808" y="1700784"/>
-            <a:ext cx="4992624" cy="3703320"/>
+            <a:off x="1115568" y="2895600"/>
+            <a:ext cx="10527487" cy="1386839"/>
           </a:xfrm>
           <a:prstGeom prst="rect">
             <a:avLst/>
@@ -13819,203 +14059,53 @@
           <a:p>
             <a:pPr>
               <a:spcAft>
-                <a:spcPts val="700"/>
+                <a:spcPts val="300"/>
               </a:spcAft>
             </a:pPr>
             <a:r>
               <a:rPr sz="1900" b="1" i="0">
-                <a:solidFill>
-                  <a:srgbClr val="006E96"/>
-                </a:solidFill>
-                <a:latin typeface="Arial"/>
-              </a:rPr>
-              <a:t>WHAT DOES NOT</a:t>
-            </a:r>
-          </a:p>
-          <a:p>
-            <a:pPr>
-              <a:spcAft>
-                <a:spcPts val="700"/>
-              </a:spcAft>
-            </a:pPr>
-            <a:r>
-              <a:rPr sz="1600" b="0" i="0">
                 <a:solidFill>
                   <a:srgbClr val="1A1A1A"/>
                 </a:solidFill>
                 <a:latin typeface="Arial"/>
               </a:rPr>
-              <a:t>The five phases.</a:t>
+              <a:t>Sign off honestly</a:t>
             </a:r>
           </a:p>
           <a:p>
             <a:pPr>
               <a:spcAft>
-                <a:spcPts val="700"/>
+                <a:spcPts val="300"/>
               </a:spcAft>
             </a:pPr>
             <a:r>
-              <a:rPr sz="1600" b="0" i="0">
-                <a:solidFill>
-                  <a:srgbClr val="1A1A1A"/>
-                </a:solidFill>
-                <a:latin typeface="Arial"/>
-              </a:rPr>
-              <a:t>The four sign-offs.</a:t>
-            </a:r>
-          </a:p>
-          <a:p>
-            <a:pPr>
-              <a:spcAft>
-                <a:spcPts val="700"/>
-              </a:spcAft>
-            </a:pPr>
-            <a:r>
-              <a:rPr sz="1600" b="0" i="0">
-                <a:solidFill>
-                  <a:srgbClr val="1A1A1A"/>
-                </a:solidFill>
-                <a:latin typeface="Arial"/>
-              </a:rPr>
-              <a:t>The six deliverables.</a:t>
-            </a:r>
-          </a:p>
-          <a:p>
-            <a:pPr>
-              <a:spcAft>
-                <a:spcPts val="700"/>
-              </a:spcAft>
-            </a:pPr>
-            <a:r>
-              <a:rPr sz="1600" b="0" i="0">
-                <a:solidFill>
-                  <a:srgbClr val="1A1A1A"/>
-                </a:solidFill>
-                <a:latin typeface="Arial"/>
-              </a:rPr>
-              <a:t>Reuse before build.</a:t>
-            </a:r>
-          </a:p>
-          <a:p>
-            <a:pPr>
-              <a:spcAft>
-                <a:spcPts val="700"/>
-              </a:spcAft>
-            </a:pPr>
-            <a:r>
-              <a:rPr sz="1600" b="0" i="0">
-                <a:solidFill>
-                  <a:srgbClr val="1A1A1A"/>
-                </a:solidFill>
-                <a:latin typeface="Arial"/>
-              </a:rPr>
-              <a:t>The binding Board.</a:t>
-            </a:r>
-          </a:p>
-        </p:txBody>
-      </p:sp>
-      <p:sp>
-        <p:nvSpPr>
-          <p:cNvPr id="8" name="TextBox 7"/>
-          <p:cNvSpPr txBox="1"/>
-          <p:nvPr/>
-        </p:nvSpPr>
-        <p:spPr>
-          <a:xfrm>
-            <a:off x="658368" y="5715000"/>
-            <a:ext cx="10881360" cy="548640"/>
-          </a:xfrm>
-          <a:prstGeom prst="rect">
-            <a:avLst/>
-          </a:prstGeom>
-          <a:noFill/>
-        </p:spPr>
-        <p:txBody>
-          <a:bodyPr wrap="square">
-            <a:spAutoFit/>
-          </a:bodyPr>
-          <a:lstStyle/>
-          <a:p>
-            <a:r>
-              <a:rPr sz="1550" b="1" i="0">
-                <a:solidFill>
-                  <a:srgbClr val="006E96"/>
-                </a:solidFill>
-                <a:latin typeface="Arial"/>
-              </a:rPr>
-              <a:t>The contents are yours. The method is the same one you just watched.</a:t>
-            </a:r>
-          </a:p>
-        </p:txBody>
-      </p:sp>
-      <p:sp>
-        <p:nvSpPr>
-          <p:cNvPr id="9" name="TextBox 8"/>
-          <p:cNvSpPr txBox="1"/>
-          <p:nvPr/>
-        </p:nvSpPr>
-        <p:spPr>
-          <a:xfrm>
-            <a:off x="457200" y="6473952"/>
-            <a:ext cx="7772400" cy="292608"/>
-          </a:xfrm>
-          <a:prstGeom prst="rect">
-            <a:avLst/>
-          </a:prstGeom>
-          <a:noFill/>
-        </p:spPr>
-        <p:txBody>
-          <a:bodyPr wrap="square">
-            <a:spAutoFit/>
-          </a:bodyPr>
-          <a:lstStyle/>
-          <a:p>
-            <a:r>
-              <a:rPr sz="900" b="0" i="0">
+              <a:rPr sz="1550" b="0" i="0">
                 <a:solidFill>
                   <a:srgbClr val="595959"/>
                 </a:solidFill>
                 <a:latin typeface="Arial"/>
               </a:rPr>
-              <a:t>4.8 · Run this on your own sector — the transferable recipe</a:t>
-            </a:r>
-          </a:p>
-        </p:txBody>
-      </p:sp>
-    </p:spTree>
-  </p:cSld>
-  <p:clrMapOvr>
-    <a:masterClrMapping/>
-  </p:clrMapOvr>
-</p:sld>
-</file>
-
-<file path=ppt/slides/slide54.xml><?xml version="1.0" encoding="utf-8"?>
-<p:sld xmlns:a="http://schemas.openxmlformats.org/drawingml/2006/main" xmlns:p="http://schemas.openxmlformats.org/presentationml/2006/main" xmlns:r="http://schemas.openxmlformats.org/officeDocument/2006/relationships">
-  <p:cSld>
-    <p:spTree>
-      <p:nvGrpSpPr>
-        <p:cNvPr id="1" name=""/>
-        <p:cNvGrpSpPr/>
-        <p:nvPr/>
-      </p:nvGrpSpPr>
-      <p:grpSpPr/>
-      <p:sp>
-        <p:nvSpPr>
-          <p:cNvPr id="2" name="Rectangle 1"/>
+              <a:t>Including the politically uncomfortable gap — the flattering assessment fails later.</a:t>
+            </a:r>
+          </a:p>
+        </p:txBody>
+      </p:sp>
+      <p:sp>
+        <p:nvSpPr>
+          <p:cNvPr id="9" name="Rectangle 8"/>
           <p:cNvSpPr/>
           <p:nvPr/>
         </p:nvSpPr>
         <p:spPr>
           <a:xfrm>
-            <a:off x="457200" y="384048"/>
-            <a:ext cx="45720" cy="256032"/>
+            <a:off x="621792" y="4287011"/>
+            <a:ext cx="10881360" cy="12700"/>
           </a:xfrm>
           <a:prstGeom prst="rect">
             <a:avLst/>
           </a:prstGeom>
           <a:solidFill>
-            <a:srgbClr val="009CD6"/>
+            <a:srgbClr val="DDECF4"/>
           </a:solidFill>
           <a:ln>
             <a:noFill/>
@@ -14046,95 +14136,20 @@
       </p:sp>
       <p:sp>
         <p:nvSpPr>
-          <p:cNvPr id="3" name="TextBox 2"/>
-          <p:cNvSpPr txBox="1"/>
+          <p:cNvPr id="10" name="Oval 9"/>
+          <p:cNvSpPr/>
           <p:nvPr/>
         </p:nvSpPr>
         <p:spPr>
           <a:xfrm>
-            <a:off x="621792" y="274320"/>
-            <a:ext cx="11247120" cy="914400"/>
-          </a:xfrm>
-          <a:prstGeom prst="rect">
+            <a:off x="621792" y="4373879"/>
+            <a:ext cx="310896" cy="310896"/>
+          </a:xfrm>
+          <a:prstGeom prst="ellipse">
             <a:avLst/>
           </a:prstGeom>
-          <a:noFill/>
-        </p:spPr>
-        <p:txBody>
-          <a:bodyPr wrap="square">
-            <a:spAutoFit/>
-          </a:bodyPr>
-          <a:lstStyle/>
-          <a:p>
-            <a:r>
-              <a:rPr sz="2800" b="1" i="0">
-                <a:solidFill>
-                  <a:srgbClr val="1A1A1A"/>
-                </a:solidFill>
-                <a:latin typeface="Arial"/>
-              </a:rPr>
-              <a:t>The method travels — and the second sector is cheaper than the first</a:t>
-            </a:r>
-          </a:p>
-        </p:txBody>
-      </p:sp>
-      <p:sp>
-        <p:nvSpPr>
-          <p:cNvPr id="4" name="TextBox 3"/>
-          <p:cNvSpPr txBox="1"/>
-          <p:nvPr/>
-        </p:nvSpPr>
-        <p:spPr>
-          <a:xfrm>
-            <a:off x="658368" y="1600200"/>
-            <a:ext cx="10881360" cy="1508760"/>
-          </a:xfrm>
-          <a:prstGeom prst="rect">
-            <a:avLst/>
-          </a:prstGeom>
-          <a:noFill/>
-        </p:spPr>
-        <p:txBody>
-          <a:bodyPr wrap="square">
-            <a:spAutoFit/>
-          </a:bodyPr>
-          <a:lstStyle/>
-          <a:p>
-            <a:pPr>
-              <a:spcAft>
-                <a:spcPts val="1200"/>
-              </a:spcAft>
-            </a:pPr>
-            <a:r>
-              <a:rPr sz="2000" b="0" i="0">
-                <a:solidFill>
-                  <a:srgbClr val="1A1A1A"/>
-                </a:solidFill>
-                <a:latin typeface="Arial"/>
-              </a:rPr>
-              <a:t>The same five phases run on health (a patient record), agriculture (a farmer registry), social protection (a beneficiary record). Same shapes, same steps.</a:t>
-            </a:r>
-          </a:p>
-        </p:txBody>
-      </p:sp>
-      <p:sp>
-        <p:nvSpPr>
-          <p:cNvPr id="5" name="Rounded Rectangle 4"/>
-          <p:cNvSpPr/>
-          <p:nvPr/>
-        </p:nvSpPr>
-        <p:spPr>
-          <a:xfrm>
-            <a:off x="658368" y="3291840"/>
-            <a:ext cx="10881360" cy="1325880"/>
-          </a:xfrm>
-          <a:prstGeom prst="roundRect">
-            <a:avLst>
-              <a:gd name="adj" fmla="val 4500"/>
-            </a:avLst>
-          </a:prstGeom>
           <a:solidFill>
-            <a:srgbClr val="E5F5FB"/>
+            <a:srgbClr val="009CD6"/>
           </a:solidFill>
           <a:ln>
             <a:noFill/>
@@ -14156,23 +14171,32 @@
           </a:fontRef>
         </p:style>
         <p:txBody>
-          <a:bodyPr rtlCol="0" anchor="ctr"/>
+          <a:bodyPr rtlCol="0" anchor="ctr" lIns="0" rIns="0" tIns="0" bIns="0" wrap="square"/>
           <a:lstStyle/>
           <a:p>
             <a:pPr algn="ctr"/>
-          </a:p>
-        </p:txBody>
-      </p:sp>
-      <p:sp>
-        <p:nvSpPr>
-          <p:cNvPr id="6" name="TextBox 5"/>
+            <a:r>
+              <a:rPr sz="1300" b="1" i="0">
+                <a:solidFill>
+                  <a:srgbClr val="FFFFFF"/>
+                </a:solidFill>
+                <a:latin typeface="Arial"/>
+              </a:rPr>
+              <a:t>3</a:t>
+            </a:r>
+          </a:p>
+        </p:txBody>
+      </p:sp>
+      <p:sp>
+        <p:nvSpPr>
+          <p:cNvPr id="11" name="TextBox 10"/>
           <p:cNvSpPr txBox="1"/>
           <p:nvPr/>
         </p:nvSpPr>
         <p:spPr>
           <a:xfrm>
-            <a:off x="859536" y="3483864"/>
-            <a:ext cx="10479024" cy="1051560"/>
+            <a:off x="1115568" y="4328159"/>
+            <a:ext cx="10527487" cy="1386839"/>
           </a:xfrm>
           <a:prstGeom prst="rect">
             <a:avLst/>
@@ -14187,24 +14211,74 @@
           <a:p>
             <a:pPr>
               <a:spcAft>
-                <a:spcPts val="700"/>
+                <a:spcPts val="300"/>
               </a:spcAft>
             </a:pPr>
             <a:r>
-              <a:rPr sz="2300" b="1" i="0">
+              <a:rPr sz="1900" b="1" i="0">
+                <a:solidFill>
+                  <a:srgbClr val="1A1A1A"/>
+                </a:solidFill>
+                <a:latin typeface="Arial"/>
+              </a:rPr>
+              <a:t>Protect the team</a:t>
+            </a:r>
+          </a:p>
+          <a:p>
+            <a:pPr>
+              <a:spcAft>
+                <a:spcPts val="300"/>
+              </a:spcAft>
+            </a:pPr>
+            <a:r>
+              <a:rPr sz="1550" b="0" i="0">
+                <a:solidFill>
+                  <a:srgbClr val="595959"/>
+                </a:solidFill>
+                <a:latin typeface="Arial"/>
+              </a:rPr>
+              <a:t>The practice dies when the architects are pulled onto the urgent project of the week.</a:t>
+            </a:r>
+          </a:p>
+        </p:txBody>
+      </p:sp>
+      <p:sp>
+        <p:nvSpPr>
+          <p:cNvPr id="12" name="TextBox 11"/>
+          <p:cNvSpPr txBox="1"/>
+          <p:nvPr/>
+        </p:nvSpPr>
+        <p:spPr>
+          <a:xfrm>
+            <a:off x="658368" y="5870448"/>
+            <a:ext cx="10881360" cy="548640"/>
+          </a:xfrm>
+          <a:prstGeom prst="rect">
+            <a:avLst/>
+          </a:prstGeom>
+          <a:noFill/>
+        </p:spPr>
+        <p:txBody>
+          <a:bodyPr wrap="square">
+            <a:spAutoFit/>
+          </a:bodyPr>
+          <a:lstStyle/>
+          <a:p>
+            <a:r>
+              <a:rPr sz="1550" b="1" i="0">
                 <a:solidFill>
                   <a:srgbClr val="006E96"/>
                 </a:solidFill>
                 <a:latin typeface="Arial"/>
               </a:rPr>
-              <a:t>The team, the framework and the governance are already there.</a:t>
-            </a:r>
-          </a:p>
-        </p:txBody>
-      </p:sp>
-      <p:sp>
-        <p:nvSpPr>
-          <p:cNvPr id="7" name="TextBox 6"/>
+              <a:t>Get those three right and the method does the rest.</a:t>
+            </a:r>
+          </a:p>
+        </p:txBody>
+      </p:sp>
+      <p:sp>
+        <p:nvSpPr>
+          <p:cNvPr id="13" name="TextBox 12"/>
           <p:cNvSpPr txBox="1"/>
           <p:nvPr/>
         </p:nvSpPr>
@@ -14244,7 +14318,7 @@
 </p:sld>
 </file>
 
-<file path=ppt/slides/slide55.xml><?xml version="1.0" encoding="utf-8"?>
+<file path=ppt/slides/slide64.xml><?xml version="1.0" encoding="utf-8"?>
 <p:sld xmlns:a="http://schemas.openxmlformats.org/drawingml/2006/main" xmlns:p="http://schemas.openxmlformats.org/presentationml/2006/main" xmlns:r="http://schemas.openxmlformats.org/officeDocument/2006/relationships">
   <p:cSld>
     <p:spTree>
@@ -14256,23 +14330,95 @@
       <p:grpSpPr/>
       <p:sp>
         <p:nvSpPr>
-          <p:cNvPr id="2" name="Rectangle 1"/>
-          <p:cNvSpPr/>
+          <p:cNvPr id="2" name="TextBox 1"/>
+          <p:cNvSpPr txBox="1"/>
           <p:nvPr/>
         </p:nvSpPr>
         <p:spPr>
           <a:xfrm>
-            <a:off x="457200" y="384048"/>
-            <a:ext cx="45720" cy="256032"/>
+            <a:off x="1005840" y="2103120"/>
+            <a:ext cx="10149840" cy="2377440"/>
           </a:xfrm>
           <a:prstGeom prst="rect">
             <a:avLst/>
           </a:prstGeom>
+          <a:noFill/>
+        </p:spPr>
+        <p:txBody>
+          <a:bodyPr wrap="square">
+            <a:spAutoFit/>
+          </a:bodyPr>
+          <a:lstStyle/>
+          <a:p>
+            <a:r>
+              <a:rPr sz="3000" b="1" i="0">
+                <a:solidFill>
+                  <a:srgbClr val="1A1A1A"/>
+                </a:solidFill>
+                <a:latin typeface="Arial"/>
+              </a:rPr>
+              <a:t>Five phases, four sign-offs, six deliverables — change the institutions and the data domains, and the method you watched on Progressa runs on any sector you are handed.</a:t>
+            </a:r>
+          </a:p>
+        </p:txBody>
+      </p:sp>
+      <p:sp>
+        <p:nvSpPr>
+          <p:cNvPr id="3" name="TextBox 2"/>
+          <p:cNvSpPr txBox="1"/>
+          <p:nvPr/>
+        </p:nvSpPr>
+        <p:spPr>
+          <a:xfrm>
+            <a:off x="1005840" y="1554480"/>
+            <a:ext cx="5486400" cy="365760"/>
+          </a:xfrm>
+          <a:prstGeom prst="rect">
+            <a:avLst/>
+          </a:prstGeom>
+          <a:noFill/>
+        </p:spPr>
+        <p:txBody>
+          <a:bodyPr wrap="square">
+            <a:spAutoFit/>
+          </a:bodyPr>
+          <a:lstStyle/>
+          <a:p>
+            <a:r>
+              <a:rPr sz="1200" b="1" i="0">
+                <a:solidFill>
+                  <a:srgbClr val="006E96"/>
+                </a:solidFill>
+                <a:latin typeface="Arial"/>
+              </a:rPr>
+              <a:t>IN ONE SENTENCE</a:t>
+            </a:r>
+          </a:p>
+        </p:txBody>
+      </p:sp>
+      <p:sp>
+        <p:nvSpPr>
+          <p:cNvPr id="4" name="Rounded Rectangle 3"/>
+          <p:cNvSpPr/>
+          <p:nvPr/>
+        </p:nvSpPr>
+        <p:spPr>
+          <a:xfrm>
+            <a:off x="658368" y="4709160"/>
+            <a:ext cx="10881360" cy="1554480"/>
+          </a:xfrm>
+          <a:prstGeom prst="roundRect">
+            <a:avLst>
+              <a:gd name="adj" fmla="val 4500"/>
+            </a:avLst>
+          </a:prstGeom>
           <a:solidFill>
-            <a:srgbClr val="009CD6"/>
+            <a:srgbClr val="FFFFFF"/>
           </a:solidFill>
-          <a:ln>
-            <a:noFill/>
+          <a:ln w="9525">
+            <a:solidFill>
+              <a:srgbClr val="009CD6"/>
+            </a:solidFill>
           </a:ln>
           <a:effectLst/>
         </p:spPr>
@@ -14291,496 +14437,56 @@
           </a:fontRef>
         </p:style>
         <p:txBody>
-          <a:bodyPr rtlCol="0" anchor="ctr"/>
-          <a:lstStyle/>
-          <a:p>
-            <a:pPr algn="ctr"/>
-          </a:p>
-        </p:txBody>
-      </p:sp>
-      <p:sp>
-        <p:nvSpPr>
-          <p:cNvPr id="3" name="TextBox 2"/>
-          <p:cNvSpPr txBox="1"/>
-          <p:nvPr/>
-        </p:nvSpPr>
-        <p:spPr>
-          <a:xfrm>
-            <a:off x="621792" y="274320"/>
-            <a:ext cx="11247120" cy="914400"/>
-          </a:xfrm>
-          <a:prstGeom prst="rect">
-            <a:avLst/>
-          </a:prstGeom>
-          <a:noFill/>
-        </p:spPr>
-        <p:txBody>
-          <a:bodyPr wrap="square">
-            <a:spAutoFit/>
+          <a:bodyPr rtlCol="0" anchor="ctr" wrap="square" lIns="228600" rIns="228600" tIns="109728" bIns="109728">
+            <a:noAutofit/>
           </a:bodyPr>
           <a:lstStyle/>
           <a:p>
-            <a:r>
-              <a:rPr sz="2800" b="1" i="0">
+            <a:pPr algn="l">
+              <a:spcAft>
+                <a:spcPts val="400"/>
+              </a:spcAft>
+            </a:pPr>
+            <a:r>
+              <a:rPr sz="1800" b="1" i="0">
+                <a:solidFill>
+                  <a:srgbClr val="006E96"/>
+                </a:solidFill>
+                <a:latin typeface="Arial"/>
+              </a:rPr>
+              <a:t>Do this on your own sector. </a:t>
+            </a:r>
+            <a:r>
+              <a:rPr sz="1800" b="1" i="0">
                 <a:solidFill>
                   <a:srgbClr val="1A1A1A"/>
                 </a:solidFill>
                 <a:latin typeface="Arial"/>
               </a:rPr>
-              <a:t>Three things to carry from Progressa into your own sector</a:t>
-            </a:r>
-          </a:p>
-        </p:txBody>
-      </p:sp>
-      <p:sp>
-        <p:nvSpPr>
-          <p:cNvPr id="4" name="Oval 3"/>
-          <p:cNvSpPr/>
-          <p:nvPr/>
-        </p:nvSpPr>
-        <p:spPr>
-          <a:xfrm>
-            <a:off x="621792" y="1508760"/>
-            <a:ext cx="310896" cy="310896"/>
-          </a:xfrm>
-          <a:prstGeom prst="ellipse">
-            <a:avLst/>
-          </a:prstGeom>
-          <a:solidFill>
-            <a:srgbClr val="009CD6"/>
-          </a:solidFill>
-          <a:ln>
-            <a:noFill/>
-          </a:ln>
-          <a:effectLst/>
-        </p:spPr>
-        <p:style>
-          <a:lnRef idx="1">
-            <a:schemeClr val="accent1"/>
-          </a:lnRef>
-          <a:fillRef idx="3">
-            <a:schemeClr val="accent1"/>
-          </a:fillRef>
-          <a:effectRef idx="2">
-            <a:schemeClr val="accent1"/>
-          </a:effectRef>
-          <a:fontRef idx="minor">
-            <a:schemeClr val="lt1"/>
-          </a:fontRef>
-        </p:style>
-        <p:txBody>
-          <a:bodyPr rtlCol="0" anchor="ctr" lIns="0" rIns="0" tIns="0" bIns="0" wrap="square"/>
-          <a:lstStyle/>
-          <a:p>
-            <a:pPr algn="ctr"/>
-            <a:r>
-              <a:rPr sz="1300" b="1" i="0">
-                <a:solidFill>
-                  <a:srgbClr val="FFFFFF"/>
-                </a:solidFill>
-                <a:latin typeface="Arial"/>
-              </a:rPr>
-              <a:t>1</a:t>
-            </a:r>
-          </a:p>
-        </p:txBody>
-      </p:sp>
-      <p:sp>
-        <p:nvSpPr>
-          <p:cNvPr id="5" name="TextBox 4"/>
-          <p:cNvSpPr txBox="1"/>
-          <p:nvPr/>
-        </p:nvSpPr>
-        <p:spPr>
-          <a:xfrm>
-            <a:off x="1115568" y="1463040"/>
-            <a:ext cx="10527487" cy="1386839"/>
-          </a:xfrm>
-          <a:prstGeom prst="rect">
-            <a:avLst/>
-          </a:prstGeom>
-          <a:noFill/>
-        </p:spPr>
-        <p:txBody>
-          <a:bodyPr wrap="square">
-            <a:spAutoFit/>
-          </a:bodyPr>
-          <a:lstStyle/>
-          <a:p>
-            <a:pPr>
+              <a:t>Map the Progressa method to your sector.</a:t>
+            </a:r>
+          </a:p>
+          <a:p>
+            <a:pPr algn="l">
               <a:spcAft>
-                <a:spcPts val="300"/>
+                <a:spcPts val="400"/>
               </a:spcAft>
             </a:pPr>
             <a:r>
-              <a:rPr sz="1900" b="1" i="0">
-                <a:solidFill>
-                  <a:srgbClr val="1A1A1A"/>
-                </a:solidFill>
-                <a:latin typeface="Arial"/>
-              </a:rPr>
-              <a:t>Start small</a:t>
-            </a:r>
-          </a:p>
-          <a:p>
-            <a:pPr>
-              <a:spcAft>
-                <a:spcPts val="300"/>
-              </a:spcAft>
-            </a:pPr>
-            <a:r>
-              <a:rPr sz="1550" b="0" i="0">
+              <a:rPr sz="1800" b="0" i="0">
                 <a:solidFill>
                   <a:srgbClr val="595959"/>
                 </a:solidFill>
                 <a:latin typeface="Arial"/>
               </a:rPr>
-              <a:t>Pick the one high-priority use case and make it land in an early wave.</a:t>
-            </a:r>
-          </a:p>
-        </p:txBody>
-      </p:sp>
-      <p:sp>
-        <p:nvSpPr>
-          <p:cNvPr id="6" name="Rectangle 5"/>
-          <p:cNvSpPr/>
-          <p:nvPr/>
-        </p:nvSpPr>
-        <p:spPr>
-          <a:xfrm>
-            <a:off x="621792" y="2854452"/>
-            <a:ext cx="10881360" cy="12700"/>
-          </a:xfrm>
-          <a:prstGeom prst="rect">
-            <a:avLst/>
-          </a:prstGeom>
-          <a:solidFill>
-            <a:srgbClr val="DDECF4"/>
-          </a:solidFill>
-          <a:ln>
-            <a:noFill/>
-          </a:ln>
-          <a:effectLst/>
-        </p:spPr>
-        <p:style>
-          <a:lnRef idx="1">
-            <a:schemeClr val="accent1"/>
-          </a:lnRef>
-          <a:fillRef idx="3">
-            <a:schemeClr val="accent1"/>
-          </a:fillRef>
-          <a:effectRef idx="2">
-            <a:schemeClr val="accent1"/>
-          </a:effectRef>
-          <a:fontRef idx="minor">
-            <a:schemeClr val="lt1"/>
-          </a:fontRef>
-        </p:style>
-        <p:txBody>
-          <a:bodyPr rtlCol="0" anchor="ctr"/>
-          <a:lstStyle/>
-          <a:p>
-            <a:pPr algn="ctr"/>
-          </a:p>
-        </p:txBody>
-      </p:sp>
-      <p:sp>
-        <p:nvSpPr>
-          <p:cNvPr id="7" name="Oval 6"/>
-          <p:cNvSpPr/>
-          <p:nvPr/>
-        </p:nvSpPr>
-        <p:spPr>
-          <a:xfrm>
-            <a:off x="621792" y="2941319"/>
-            <a:ext cx="310896" cy="310896"/>
-          </a:xfrm>
-          <a:prstGeom prst="ellipse">
-            <a:avLst/>
-          </a:prstGeom>
-          <a:solidFill>
-            <a:srgbClr val="009CD6"/>
-          </a:solidFill>
-          <a:ln>
-            <a:noFill/>
-          </a:ln>
-          <a:effectLst/>
-        </p:spPr>
-        <p:style>
-          <a:lnRef idx="1">
-            <a:schemeClr val="accent1"/>
-          </a:lnRef>
-          <a:fillRef idx="3">
-            <a:schemeClr val="accent1"/>
-          </a:fillRef>
-          <a:effectRef idx="2">
-            <a:schemeClr val="accent1"/>
-          </a:effectRef>
-          <a:fontRef idx="minor">
-            <a:schemeClr val="lt1"/>
-          </a:fontRef>
-        </p:style>
-        <p:txBody>
-          <a:bodyPr rtlCol="0" anchor="ctr" lIns="0" rIns="0" tIns="0" bIns="0" wrap="square"/>
-          <a:lstStyle/>
-          <a:p>
-            <a:pPr algn="ctr"/>
-            <a:r>
-              <a:rPr sz="1300" b="1" i="0">
-                <a:solidFill>
-                  <a:srgbClr val="FFFFFF"/>
-                </a:solidFill>
-                <a:latin typeface="Arial"/>
-              </a:rPr>
-              <a:t>2</a:t>
-            </a:r>
-          </a:p>
-        </p:txBody>
-      </p:sp>
-      <p:sp>
-        <p:nvSpPr>
-          <p:cNvPr id="8" name="TextBox 7"/>
-          <p:cNvSpPr txBox="1"/>
-          <p:nvPr/>
-        </p:nvSpPr>
-        <p:spPr>
-          <a:xfrm>
-            <a:off x="1115568" y="2895600"/>
-            <a:ext cx="10527487" cy="1386839"/>
-          </a:xfrm>
-          <a:prstGeom prst="rect">
-            <a:avLst/>
-          </a:prstGeom>
-          <a:noFill/>
-        </p:spPr>
-        <p:txBody>
-          <a:bodyPr wrap="square">
-            <a:spAutoFit/>
-          </a:bodyPr>
-          <a:lstStyle/>
-          <a:p>
-            <a:pPr>
-              <a:spcAft>
-                <a:spcPts val="300"/>
-              </a:spcAft>
-            </a:pPr>
-            <a:r>
-              <a:rPr sz="1900" b="1" i="0">
-                <a:solidFill>
-                  <a:srgbClr val="1A1A1A"/>
-                </a:solidFill>
-                <a:latin typeface="Arial"/>
-              </a:rPr>
-              <a:t>Sign off honestly</a:t>
-            </a:r>
-          </a:p>
-          <a:p>
-            <a:pPr>
-              <a:spcAft>
-                <a:spcPts val="300"/>
-              </a:spcAft>
-            </a:pPr>
-            <a:r>
-              <a:rPr sz="1550" b="0" i="0">
-                <a:solidFill>
-                  <a:srgbClr val="595959"/>
-                </a:solidFill>
-                <a:latin typeface="Arial"/>
-              </a:rPr>
-              <a:t>Including the politically uncomfortable gap — the flattering assessment fails later.</a:t>
-            </a:r>
-          </a:p>
-        </p:txBody>
-      </p:sp>
-      <p:sp>
-        <p:nvSpPr>
-          <p:cNvPr id="9" name="Rectangle 8"/>
-          <p:cNvSpPr/>
-          <p:nvPr/>
-        </p:nvSpPr>
-        <p:spPr>
-          <a:xfrm>
-            <a:off x="621792" y="4287011"/>
-            <a:ext cx="10881360" cy="12700"/>
-          </a:xfrm>
-          <a:prstGeom prst="rect">
-            <a:avLst/>
-          </a:prstGeom>
-          <a:solidFill>
-            <a:srgbClr val="DDECF4"/>
-          </a:solidFill>
-          <a:ln>
-            <a:noFill/>
-          </a:ln>
-          <a:effectLst/>
-        </p:spPr>
-        <p:style>
-          <a:lnRef idx="1">
-            <a:schemeClr val="accent1"/>
-          </a:lnRef>
-          <a:fillRef idx="3">
-            <a:schemeClr val="accent1"/>
-          </a:fillRef>
-          <a:effectRef idx="2">
-            <a:schemeClr val="accent1"/>
-          </a:effectRef>
-          <a:fontRef idx="minor">
-            <a:schemeClr val="lt1"/>
-          </a:fontRef>
-        </p:style>
-        <p:txBody>
-          <a:bodyPr rtlCol="0" anchor="ctr"/>
-          <a:lstStyle/>
-          <a:p>
-            <a:pPr algn="ctr"/>
-          </a:p>
-        </p:txBody>
-      </p:sp>
-      <p:sp>
-        <p:nvSpPr>
-          <p:cNvPr id="10" name="Oval 9"/>
-          <p:cNvSpPr/>
-          <p:nvPr/>
-        </p:nvSpPr>
-        <p:spPr>
-          <a:xfrm>
-            <a:off x="621792" y="4373879"/>
-            <a:ext cx="310896" cy="310896"/>
-          </a:xfrm>
-          <a:prstGeom prst="ellipse">
-            <a:avLst/>
-          </a:prstGeom>
-          <a:solidFill>
-            <a:srgbClr val="009CD6"/>
-          </a:solidFill>
-          <a:ln>
-            <a:noFill/>
-          </a:ln>
-          <a:effectLst/>
-        </p:spPr>
-        <p:style>
-          <a:lnRef idx="1">
-            <a:schemeClr val="accent1"/>
-          </a:lnRef>
-          <a:fillRef idx="3">
-            <a:schemeClr val="accent1"/>
-          </a:fillRef>
-          <a:effectRef idx="2">
-            <a:schemeClr val="accent1"/>
-          </a:effectRef>
-          <a:fontRef idx="minor">
-            <a:schemeClr val="lt1"/>
-          </a:fontRef>
-        </p:style>
-        <p:txBody>
-          <a:bodyPr rtlCol="0" anchor="ctr" lIns="0" rIns="0" tIns="0" bIns="0" wrap="square"/>
-          <a:lstStyle/>
-          <a:p>
-            <a:pPr algn="ctr"/>
-            <a:r>
-              <a:rPr sz="1300" b="1" i="0">
-                <a:solidFill>
-                  <a:srgbClr val="FFFFFF"/>
-                </a:solidFill>
-                <a:latin typeface="Arial"/>
-              </a:rPr>
-              <a:t>3</a:t>
-            </a:r>
-          </a:p>
-        </p:txBody>
-      </p:sp>
-      <p:sp>
-        <p:nvSpPr>
-          <p:cNvPr id="11" name="TextBox 10"/>
-          <p:cNvSpPr txBox="1"/>
-          <p:nvPr/>
-        </p:nvSpPr>
-        <p:spPr>
-          <a:xfrm>
-            <a:off x="1115568" y="4328159"/>
-            <a:ext cx="10527487" cy="1386839"/>
-          </a:xfrm>
-          <a:prstGeom prst="rect">
-            <a:avLst/>
-          </a:prstGeom>
-          <a:noFill/>
-        </p:spPr>
-        <p:txBody>
-          <a:bodyPr wrap="square">
-            <a:spAutoFit/>
-          </a:bodyPr>
-          <a:lstStyle/>
-          <a:p>
-            <a:pPr>
-              <a:spcAft>
-                <a:spcPts val="300"/>
-              </a:spcAft>
-            </a:pPr>
-            <a:r>
-              <a:rPr sz="1900" b="1" i="0">
-                <a:solidFill>
-                  <a:srgbClr val="1A1A1A"/>
-                </a:solidFill>
-                <a:latin typeface="Arial"/>
-              </a:rPr>
-              <a:t>Protect the team</a:t>
-            </a:r>
-          </a:p>
-          <a:p>
-            <a:pPr>
-              <a:spcAft>
-                <a:spcPts val="300"/>
-              </a:spcAft>
-            </a:pPr>
-            <a:r>
-              <a:rPr sz="1550" b="0" i="0">
-                <a:solidFill>
-                  <a:srgbClr val="595959"/>
-                </a:solidFill>
-                <a:latin typeface="Arial"/>
-              </a:rPr>
-              <a:t>The practice dies when the architects are pulled onto the urgent project of the week.</a:t>
-            </a:r>
-          </a:p>
-        </p:txBody>
-      </p:sp>
-      <p:sp>
-        <p:nvSpPr>
-          <p:cNvPr id="12" name="TextBox 11"/>
-          <p:cNvSpPr txBox="1"/>
-          <p:nvPr/>
-        </p:nvSpPr>
-        <p:spPr>
-          <a:xfrm>
-            <a:off x="658368" y="5870448"/>
-            <a:ext cx="10881360" cy="548640"/>
-          </a:xfrm>
-          <a:prstGeom prst="rect">
-            <a:avLst/>
-          </a:prstGeom>
-          <a:noFill/>
-        </p:spPr>
-        <p:txBody>
-          <a:bodyPr wrap="square">
-            <a:spAutoFit/>
-          </a:bodyPr>
-          <a:lstStyle/>
-          <a:p>
-            <a:r>
-              <a:rPr sz="1550" b="1" i="0">
-                <a:solidFill>
-                  <a:srgbClr val="006E96"/>
-                </a:solidFill>
-                <a:latin typeface="Arial"/>
-              </a:rPr>
-              <a:t>Get those three right and the method does the rest.</a:t>
-            </a:r>
-          </a:p>
-        </p:txBody>
-      </p:sp>
-      <p:sp>
-        <p:nvSpPr>
-          <p:cNvPr id="13" name="TextBox 12"/>
+              <a:t>The prompt in the companion material gives you a one-page transfer plan (classification, the high-priority use case, the six deliverables, the first two waves). Before the next video.</a:t>
+            </a:r>
+          </a:p>
+        </p:txBody>
+      </p:sp>
+      <p:sp>
+        <p:nvSpPr>
+          <p:cNvPr id="5" name="TextBox 4"/>
           <p:cNvSpPr txBox="1"/>
           <p:nvPr/>
         </p:nvSpPr>
@@ -14808,6 +14514,41 @@
                 <a:latin typeface="Arial"/>
               </a:rPr>
               <a:t>4.8 · Run this on your own sector — the transferable recipe</a:t>
+            </a:r>
+          </a:p>
+        </p:txBody>
+      </p:sp>
+      <p:sp>
+        <p:nvSpPr>
+          <p:cNvPr id="6" name="TextBox 5"/>
+          <p:cNvSpPr txBox="1"/>
+          <p:nvPr/>
+        </p:nvSpPr>
+        <p:spPr>
+          <a:xfrm>
+            <a:off x="10058400" y="6473952"/>
+            <a:ext cx="1673352" cy="292608"/>
+          </a:xfrm>
+          <a:prstGeom prst="rect">
+            <a:avLst/>
+          </a:prstGeom>
+          <a:noFill/>
+        </p:spPr>
+        <p:txBody>
+          <a:bodyPr wrap="square">
+            <a:spAutoFit/>
+          </a:bodyPr>
+          <a:lstStyle/>
+          <a:p>
+            <a:pPr algn="r"/>
+            <a:r>
+              <a:rPr sz="900" b="0" i="0">
+                <a:solidFill>
+                  <a:srgbClr val="595959"/>
+                </a:solidFill>
+                <a:latin typeface="Arial"/>
+              </a:rPr>
+              <a:t>www.itu.int</a:t>
             </a:r>
           </a:p>
         </p:txBody>
@@ -14820,250 +14561,7 @@
 </p:sld>
 </file>
 
-<file path=ppt/slides/slide56.xml><?xml version="1.0" encoding="utf-8"?>
-<p:sld xmlns:a="http://schemas.openxmlformats.org/drawingml/2006/main" xmlns:p="http://schemas.openxmlformats.org/presentationml/2006/main" xmlns:r="http://schemas.openxmlformats.org/officeDocument/2006/relationships">
-  <p:cSld>
-    <p:spTree>
-      <p:nvGrpSpPr>
-        <p:cNvPr id="1" name=""/>
-        <p:cNvGrpSpPr/>
-        <p:nvPr/>
-      </p:nvGrpSpPr>
-      <p:grpSpPr/>
-      <p:sp>
-        <p:nvSpPr>
-          <p:cNvPr id="2" name="TextBox 1"/>
-          <p:cNvSpPr txBox="1"/>
-          <p:nvPr/>
-        </p:nvSpPr>
-        <p:spPr>
-          <a:xfrm>
-            <a:off x="1005840" y="2103120"/>
-            <a:ext cx="10149840" cy="2377440"/>
-          </a:xfrm>
-          <a:prstGeom prst="rect">
-            <a:avLst/>
-          </a:prstGeom>
-          <a:noFill/>
-        </p:spPr>
-        <p:txBody>
-          <a:bodyPr wrap="square">
-            <a:spAutoFit/>
-          </a:bodyPr>
-          <a:lstStyle/>
-          <a:p>
-            <a:r>
-              <a:rPr sz="3000" b="1" i="0">
-                <a:solidFill>
-                  <a:srgbClr val="1A1A1A"/>
-                </a:solidFill>
-                <a:latin typeface="Arial"/>
-              </a:rPr>
-              <a:t>Five phases, four sign-offs, six deliverables — change the institutions and the data domains, and the method you watched on Progressa runs on any sector you are handed.</a:t>
-            </a:r>
-          </a:p>
-        </p:txBody>
-      </p:sp>
-      <p:sp>
-        <p:nvSpPr>
-          <p:cNvPr id="3" name="TextBox 2"/>
-          <p:cNvSpPr txBox="1"/>
-          <p:nvPr/>
-        </p:nvSpPr>
-        <p:spPr>
-          <a:xfrm>
-            <a:off x="1005840" y="1554480"/>
-            <a:ext cx="5486400" cy="365760"/>
-          </a:xfrm>
-          <a:prstGeom prst="rect">
-            <a:avLst/>
-          </a:prstGeom>
-          <a:noFill/>
-        </p:spPr>
-        <p:txBody>
-          <a:bodyPr wrap="square">
-            <a:spAutoFit/>
-          </a:bodyPr>
-          <a:lstStyle/>
-          <a:p>
-            <a:r>
-              <a:rPr sz="1200" b="1" i="0">
-                <a:solidFill>
-                  <a:srgbClr val="006E96"/>
-                </a:solidFill>
-                <a:latin typeface="Arial"/>
-              </a:rPr>
-              <a:t>IN ONE SENTENCE</a:t>
-            </a:r>
-          </a:p>
-        </p:txBody>
-      </p:sp>
-      <p:sp>
-        <p:nvSpPr>
-          <p:cNvPr id="4" name="Rounded Rectangle 3"/>
-          <p:cNvSpPr/>
-          <p:nvPr/>
-        </p:nvSpPr>
-        <p:spPr>
-          <a:xfrm>
-            <a:off x="658368" y="4709160"/>
-            <a:ext cx="10881360" cy="1554480"/>
-          </a:xfrm>
-          <a:prstGeom prst="roundRect">
-            <a:avLst>
-              <a:gd name="adj" fmla="val 4500"/>
-            </a:avLst>
-          </a:prstGeom>
-          <a:solidFill>
-            <a:srgbClr val="FFFFFF"/>
-          </a:solidFill>
-          <a:ln w="9525">
-            <a:solidFill>
-              <a:srgbClr val="009CD6"/>
-            </a:solidFill>
-          </a:ln>
-          <a:effectLst/>
-        </p:spPr>
-        <p:style>
-          <a:lnRef idx="1">
-            <a:schemeClr val="accent1"/>
-          </a:lnRef>
-          <a:fillRef idx="3">
-            <a:schemeClr val="accent1"/>
-          </a:fillRef>
-          <a:effectRef idx="2">
-            <a:schemeClr val="accent1"/>
-          </a:effectRef>
-          <a:fontRef idx="minor">
-            <a:schemeClr val="lt1"/>
-          </a:fontRef>
-        </p:style>
-        <p:txBody>
-          <a:bodyPr rtlCol="0" anchor="ctr" wrap="square" lIns="228600" rIns="228600" tIns="109728" bIns="109728">
-            <a:noAutofit/>
-          </a:bodyPr>
-          <a:lstStyle/>
-          <a:p>
-            <a:pPr algn="l">
-              <a:spcAft>
-                <a:spcPts val="400"/>
-              </a:spcAft>
-            </a:pPr>
-            <a:r>
-              <a:rPr sz="1800" b="1" i="0">
-                <a:solidFill>
-                  <a:srgbClr val="006E96"/>
-                </a:solidFill>
-                <a:latin typeface="Arial"/>
-              </a:rPr>
-              <a:t>Do this on your own sector. </a:t>
-            </a:r>
-            <a:r>
-              <a:rPr sz="1800" b="1" i="0">
-                <a:solidFill>
-                  <a:srgbClr val="1A1A1A"/>
-                </a:solidFill>
-                <a:latin typeface="Arial"/>
-              </a:rPr>
-              <a:t>Map the Progressa method to your sector.</a:t>
-            </a:r>
-          </a:p>
-          <a:p>
-            <a:pPr algn="l">
-              <a:spcAft>
-                <a:spcPts val="400"/>
-              </a:spcAft>
-            </a:pPr>
-            <a:r>
-              <a:rPr sz="1800" b="0" i="0">
-                <a:solidFill>
-                  <a:srgbClr val="595959"/>
-                </a:solidFill>
-                <a:latin typeface="Arial"/>
-              </a:rPr>
-              <a:t>The prompt in the companion material gives you a one-page transfer plan (classification, the high-priority use case, the six deliverables, the first two waves). Before the next video.</a:t>
-            </a:r>
-          </a:p>
-        </p:txBody>
-      </p:sp>
-      <p:sp>
-        <p:nvSpPr>
-          <p:cNvPr id="5" name="TextBox 4"/>
-          <p:cNvSpPr txBox="1"/>
-          <p:nvPr/>
-        </p:nvSpPr>
-        <p:spPr>
-          <a:xfrm>
-            <a:off x="457200" y="6473952"/>
-            <a:ext cx="7772400" cy="292608"/>
-          </a:xfrm>
-          <a:prstGeom prst="rect">
-            <a:avLst/>
-          </a:prstGeom>
-          <a:noFill/>
-        </p:spPr>
-        <p:txBody>
-          <a:bodyPr wrap="square">
-            <a:spAutoFit/>
-          </a:bodyPr>
-          <a:lstStyle/>
-          <a:p>
-            <a:r>
-              <a:rPr sz="900" b="0" i="0">
-                <a:solidFill>
-                  <a:srgbClr val="595959"/>
-                </a:solidFill>
-                <a:latin typeface="Arial"/>
-              </a:rPr>
-              <a:t>4.8 · Run this on your own sector — the transferable recipe</a:t>
-            </a:r>
-          </a:p>
-        </p:txBody>
-      </p:sp>
-      <p:sp>
-        <p:nvSpPr>
-          <p:cNvPr id="6" name="TextBox 5"/>
-          <p:cNvSpPr txBox="1"/>
-          <p:nvPr/>
-        </p:nvSpPr>
-        <p:spPr>
-          <a:xfrm>
-            <a:off x="10058400" y="6473952"/>
-            <a:ext cx="1673352" cy="292608"/>
-          </a:xfrm>
-          <a:prstGeom prst="rect">
-            <a:avLst/>
-          </a:prstGeom>
-          <a:noFill/>
-        </p:spPr>
-        <p:txBody>
-          <a:bodyPr wrap="square">
-            <a:spAutoFit/>
-          </a:bodyPr>
-          <a:lstStyle/>
-          <a:p>
-            <a:pPr algn="r"/>
-            <a:r>
-              <a:rPr sz="900" b="0" i="0">
-                <a:solidFill>
-                  <a:srgbClr val="595959"/>
-                </a:solidFill>
-                <a:latin typeface="Arial"/>
-              </a:rPr>
-              <a:t>www.itu.int</a:t>
-            </a:r>
-          </a:p>
-        </p:txBody>
-      </p:sp>
-    </p:spTree>
-  </p:cSld>
-  <p:clrMapOvr>
-    <a:masterClrMapping/>
-  </p:clrMapOvr>
-</p:sld>
-</file>
-
-<file path=ppt/slides/slide57.xml><?xml version="1.0" encoding="utf-8"?>
+<file path=ppt/slides/slide65.xml><?xml version="1.0" encoding="utf-8"?>
 <p:sld xmlns:a="http://schemas.openxmlformats.org/drawingml/2006/main" xmlns:p="http://schemas.openxmlformats.org/presentationml/2006/main" xmlns:r="http://schemas.openxmlformats.org/officeDocument/2006/relationships">
   <p:cSld>
     <p:spTree>

--- a/10-Knowledge-Products/KP1-GEA/videos/module_4/en/decks/KP1_M4_4.8_Deck_v0.2.pptx
+++ b/10-Knowledge-Products/KP1-GEA/videos/module_4/en/decks/KP1_M4_4.8_Deck_v0.2.pptx
@@ -11771,7 +11771,7 @@
                 </a:solidFill>
                 <a:latin typeface="Arial"/>
               </a:rPr>
-              <a:t>~4 minutes · standalone video · voice-over on text slides</a:t>
+              <a:t>standalone video · voice-over on text slides</a:t>
             </a:r>
           </a:p>
         </p:txBody>

--- a/10-Knowledge-Products/KP1-GEA/videos/module_4/en/decks/KP1_M4_4.8_Deck_v0.2.pptx
+++ b/10-Knowledge-Products/KP1-GEA/videos/module_4/en/decks/KP1_M4_4.8_Deck_v0.2.pptx
@@ -11635,7 +11635,7 @@
                 </a:solidFill>
                 <a:latin typeface="Arial"/>
               </a:rPr>
-              <a:t>KP1 · MODULE 4 · VIDEO 4.8</a:t>
+              <a:t>MODULE 4 · VIDEO 4.8</a:t>
             </a:r>
           </a:p>
         </p:txBody>
